--- a/submission/slides/Mandat_VTB.pptx
+++ b/submission/slides/Mandat_VTB.pptx
@@ -133,7 +133,7 @@
   <p:extLst>
     <p:ext uri="{521415D9-36F7-43E2-AB2F-B90AF26B5E84}">
       <p14:sectionLst xmlns:p14="http://schemas.microsoft.com/office/powerpoint/2010/main">
-        <p14:section name="Питч · 5 минут" id="{90137de3-f457-e778-371c-174fdfb7bd0b}">
+        <p14:section name="Питч · 5 минут" id="{6a6abdea-15ea-2a55-5854-1517b6515a59}">
           <p14:sldIdLst>
             <p14:sldId id="256"/>
             <p14:sldId id="257"/>
@@ -151,7 +151,7 @@
             <p14:sldId id="269"/>
           </p14:sldIdLst>
         </p14:section>
-        <p14:section name="Приложение для вопросов жюри" id="{5f7e4d2d-ec77-754e-ed88-9c60a8a5150a}">
+        <p14:section name="Приложение для вопросов жюри" id="{e1021896-3eef-b70f-86a9-e68aef450b88}">
           <p14:sldIdLst>
             <p14:sldId id="270"/>
             <p14:sldId id="271"/>
@@ -6093,7 +6093,7 @@
                   <a:schemeClr val="accent4"/>
                 </a:solidFill>
               </a:rPr>
-              <a:t>Источники: vtb.ru — «Комплект МЧД и КЭП» в «ВТБ Бизнес», 10.2026; репозиторий «Мандата» v0.3.0: 585 автотестов, evidence.json от 13.10.2026</a:t>
+              <a:t>Источники: vtb.ru — «Комплект МЧД и КЭП» в «ВТБ Бизнес», 10.2026; репозиторий «Мандата» v0.3.0: 714 автотестов, evidence.json от 14.10.2026</a:t>
             </a:r>
             <a:endParaRPr lang="en-US" sz="1000" dirty="0"/>
           </a:p>
@@ -6956,7 +6956,7 @@
                   <a:schemeClr val="bg1"/>
                 </a:solidFill>
               </a:rPr>
-              <a:t>585 автотестов проходят, каждое число воспроизводится командой</a:t>
+              <a:t>714 автотестов проходят, каждое число воспроизводится командой</a:t>
             </a:r>
             <a:endParaRPr lang="en-US" sz="1500" dirty="0"/>
           </a:p>
@@ -23545,7 +23545,7 @@
                           <a:ea typeface="Calibri" pitchFamily="34" charset="-122"/>
                           <a:cs typeface="Calibri" pitchFamily="34" charset="-120"/>
                         </a:rPr>
-                        <a:t>585 автотестов проходят (v0.3.0, evidence.json), независимая проверка на Cedar, реестр утверждений: каждое число воспроизводится командой</a:t>
+                        <a:t>714 автотестов проходят (v0.3.0, evidence.json), независимая проверка на Cedar, реестр утверждений: каждое число воспроизводится командой</a:t>
                       </a:r>
                       <a:endParaRPr lang="en-US" sz="1300" dirty="0">
                         <a:latin typeface="Calibri" charset="0"/>
@@ -31541,7 +31541,7 @@
                   <a:schemeClr val="accent4"/>
                 </a:solidFill>
               </a:rPr>
-              <a:t>Воспроизводится: mandat eval --per-defect 6; python -m pytest tests/test_properties.py tests/test_cedar.py; python scripts/bench.py → evidence.json (13.10.2026, v0.3.0)</a:t>
+              <a:t>Воспроизводится: mandat eval --per-defect 6; python -m pytest tests/test_properties.py tests/test_cedar.py; python scripts/bench.py → evidence.json (14.10.2026, v0.3.0)</a:t>
             </a:r>
             <a:endParaRPr lang="en-US" sz="1000" dirty="0"/>
           </a:p>

--- a/submission/slides/Mandat_VTB.pptx
+++ b/submission/slides/Mandat_VTB.pptx
@@ -133,7 +133,7 @@
   <p:extLst>
     <p:ext uri="{521415D9-36F7-43E2-AB2F-B90AF26B5E84}">
       <p14:sectionLst xmlns:p14="http://schemas.microsoft.com/office/powerpoint/2010/main">
-        <p14:section name="Питч · 5 минут" id="{6a6abdea-15ea-2a55-5854-1517b6515a59}">
+        <p14:section name="Питч · 5 минут" id="{33e74e2e-95ad-77ee-71cf-24ab4cc09bce}">
           <p14:sldIdLst>
             <p14:sldId id="256"/>
             <p14:sldId id="257"/>
@@ -151,7 +151,7 @@
             <p14:sldId id="269"/>
           </p14:sldIdLst>
         </p14:section>
-        <p14:section name="Приложение для вопросов жюри" id="{e1021896-3eef-b70f-86a9-e68aef450b88}">
+        <p14:section name="Приложение для вопросов жюри" id="{7739d56b-cf73-72d4-1420-6eefa2c863fc}">
           <p14:sldIdLst>
             <p14:sldId id="270"/>
             <p14:sldId id="271"/>
@@ -6093,7 +6093,7 @@
                   <a:schemeClr val="accent4"/>
                 </a:solidFill>
               </a:rPr>
-              <a:t>Источники: vtb.ru — «Комплект МЧД и КЭП» в «ВТБ Бизнес», 10.2026; репозиторий «Мандата» v0.3.0: 714 автотестов, evidence.json от 14.10.2026</a:t>
+              <a:t>Источники: vtb.ru — «Комплект МЧД и КЭП» в «ВТБ Бизнес», 10.2026; репозиторий «Мандата» v0.3.0: 731 автотест, evidence.json от 14.10.2026</a:t>
             </a:r>
             <a:endParaRPr lang="en-US" sz="1000" dirty="0"/>
           </a:p>
@@ -6956,7 +6956,7 @@
                   <a:schemeClr val="bg1"/>
                 </a:solidFill>
               </a:rPr>
-              <a:t>714 автотестов проходят, каждое число воспроизводится командой</a:t>
+              <a:t>731 автотест проходят, каждое число воспроизводится командой</a:t>
             </a:r>
             <a:endParaRPr lang="en-US" sz="1500" dirty="0"/>
           </a:p>
@@ -23545,7 +23545,7 @@
                           <a:ea typeface="Calibri" pitchFamily="34" charset="-122"/>
                           <a:cs typeface="Calibri" pitchFamily="34" charset="-120"/>
                         </a:rPr>
-                        <a:t>714 автотестов проходят (v0.3.0, evidence.json), независимая проверка на Cedar, реестр утверждений: каждое число воспроизводится командой</a:t>
+                        <a:t>731 автотест проходят (v0.3.0, evidence.json), независимая проверка на Cedar, реестр утверждений: каждое число воспроизводится командой</a:t>
                       </a:r>
                       <a:endParaRPr lang="en-US" sz="1300" dirty="0">
                         <a:latin typeface="Calibri" charset="0"/>

--- a/submission/slides/Mandat_VTB.pptx
+++ b/submission/slides/Mandat_VTB.pptx
@@ -133,7 +133,7 @@
   <p:extLst>
     <p:ext uri="{521415D9-36F7-43E2-AB2F-B90AF26B5E84}">
       <p14:sectionLst xmlns:p14="http://schemas.microsoft.com/office/powerpoint/2010/main">
-        <p14:section name="Питч · 5 минут" id="{33e74e2e-95ad-77ee-71cf-24ab4cc09bce}">
+        <p14:section name="Питч · 5 минут" id="{4e561cc6-e9d1-2381-4ccb-6134dcd699ec}">
           <p14:sldIdLst>
             <p14:sldId id="256"/>
             <p14:sldId id="257"/>
@@ -151,7 +151,7 @@
             <p14:sldId id="269"/>
           </p14:sldIdLst>
         </p14:section>
-        <p14:section name="Приложение для вопросов жюри" id="{7739d56b-cf73-72d4-1420-6eefa2c863fc}">
+        <p14:section name="Приложение для вопросов жюри" id="{fedce28e-a3a2-10e0-24c6-e5ad0d54a989}">
           <p14:sldIdLst>
             <p14:sldId id="270"/>
             <p14:sldId id="271"/>
@@ -6093,7 +6093,7 @@
                   <a:schemeClr val="accent4"/>
                 </a:solidFill>
               </a:rPr>
-              <a:t>Источники: vtb.ru — «Комплект МЧД и КЭП» в «ВТБ Бизнес», 10.2026; репозиторий «Мандата» v0.3.0: 731 автотест, evidence.json от 14.10.2026</a:t>
+              <a:t>Источники: vtb.ru — «Комплект МЧД и КЭП» в «ВТБ Бизнес», 10.2026; репозиторий «Мандата» v0.3.0: 762 автотеста, evidence.json от 14.10.2026</a:t>
             </a:r>
             <a:endParaRPr lang="en-US" sz="1000" dirty="0"/>
           </a:p>
@@ -6956,7 +6956,7 @@
                   <a:schemeClr val="bg1"/>
                 </a:solidFill>
               </a:rPr>
-              <a:t>731 автотест проходят, каждое число воспроизводится командой</a:t>
+              <a:t>762 автотеста проходят, каждое число воспроизводится командой</a:t>
             </a:r>
             <a:endParaRPr lang="en-US" sz="1500" dirty="0"/>
           </a:p>
@@ -23545,7 +23545,7 @@
                           <a:ea typeface="Calibri" pitchFamily="34" charset="-122"/>
                           <a:cs typeface="Calibri" pitchFamily="34" charset="-120"/>
                         </a:rPr>
-                        <a:t>731 автотест проходят (v0.3.0, evidence.json), независимая проверка на Cedar, реестр утверждений: каждое число воспроизводится командой</a:t>
+                        <a:t>762 автотеста проходят (v0.3.0, evidence.json), независимая проверка на Cedar, реестр утверждений: каждое число воспроизводится командой</a:t>
                       </a:r>
                       <a:endParaRPr lang="en-US" sz="1300" dirty="0">
                         <a:latin typeface="Calibri" charset="0"/>

--- a/submission/slides/Mandat_VTB.pptx
+++ b/submission/slides/Mandat_VTB.pptx
@@ -133,7 +133,7 @@
   <p:extLst>
     <p:ext uri="{521415D9-36F7-43E2-AB2F-B90AF26B5E84}">
       <p14:sectionLst xmlns:p14="http://schemas.microsoft.com/office/powerpoint/2010/main">
-        <p14:section name="Питч · 5 минут" id="{4e561cc6-e9d1-2381-4ccb-6134dcd699ec}">
+        <p14:section name="Питч · 5 минут" id="{b1a114d8-1274-edc8-8fc9-9680774e20b8}">
           <p14:sldIdLst>
             <p14:sldId id="256"/>
             <p14:sldId id="257"/>
@@ -151,7 +151,7 @@
             <p14:sldId id="269"/>
           </p14:sldIdLst>
         </p14:section>
-        <p14:section name="Приложение для вопросов жюри" id="{fedce28e-a3a2-10e0-24c6-e5ad0d54a989}">
+        <p14:section name="Приложение для вопросов жюри" id="{9ab15b76-e2ef-09c5-f90b-f4d6c067346d}">
           <p14:sldIdLst>
             <p14:sldId id="270"/>
             <p14:sldId id="271"/>
@@ -6093,7 +6093,7 @@
                   <a:schemeClr val="accent4"/>
                 </a:solidFill>
               </a:rPr>
-              <a:t>Источники: vtb.ru — «Комплект МЧД и КЭП» в «ВТБ Бизнес», 10.2026; репозиторий «Мандата» v0.3.0: 762 автотеста, evidence.json от 14.10.2026</a:t>
+              <a:t>Источники: vtb.ru — «Комплект МЧД и КЭП» в «ВТБ Бизнес», 10.2026; репозиторий «Мандата» v0.3.0: 782 автотеста, evidence.json от 14.10.2026</a:t>
             </a:r>
             <a:endParaRPr lang="en-US" sz="1000" dirty="0"/>
           </a:p>
@@ -6956,7 +6956,7 @@
                   <a:schemeClr val="bg1"/>
                 </a:solidFill>
               </a:rPr>
-              <a:t>762 автотеста проходят, каждое число воспроизводится командой</a:t>
+              <a:t>782 автотеста проходят, каждое число воспроизводится командой</a:t>
             </a:r>
             <a:endParaRPr lang="en-US" sz="1500" dirty="0"/>
           </a:p>
@@ -23545,7 +23545,7 @@
                           <a:ea typeface="Calibri" pitchFamily="34" charset="-122"/>
                           <a:cs typeface="Calibri" pitchFamily="34" charset="-120"/>
                         </a:rPr>
-                        <a:t>762 автотеста проходят (v0.3.0, evidence.json), независимая проверка на Cedar, реестр утверждений: каждое число воспроизводится командой</a:t>
+                        <a:t>782 автотеста проходят (v0.3.0, evidence.json), независимая проверка на Cedar, реестр утверждений: каждое число воспроизводится командой</a:t>
                       </a:r>
                       <a:endParaRPr lang="en-US" sz="1300" dirty="0">
                         <a:latin typeface="Calibri" charset="0"/>

--- a/submission/slides/Mandat_VTB.pptx
+++ b/submission/slides/Mandat_VTB.pptx
@@ -133,7 +133,7 @@
   <p:extLst>
     <p:ext uri="{521415D9-36F7-43E2-AB2F-B90AF26B5E84}">
       <p14:sectionLst xmlns:p14="http://schemas.microsoft.com/office/powerpoint/2010/main">
-        <p14:section name="Питч · 5 минут" id="{b1a114d8-1274-edc8-8fc9-9680774e20b8}">
+        <p14:section name="Питч · 5 минут" id="{9770c435-96f5-4b2f-3590-68d222b0a4dc}">
           <p14:sldIdLst>
             <p14:sldId id="256"/>
             <p14:sldId id="257"/>
@@ -151,7 +151,7 @@
             <p14:sldId id="269"/>
           </p14:sldIdLst>
         </p14:section>
-        <p14:section name="Приложение для вопросов жюри" id="{9ab15b76-e2ef-09c5-f90b-f4d6c067346d}">
+        <p14:section name="Приложение для вопросов жюри" id="{f2cec953-0b8c-b7f2-584f-625c45fc31be}">
           <p14:sldIdLst>
             <p14:sldId id="270"/>
             <p14:sldId id="271"/>
@@ -6093,7 +6093,7 @@
                   <a:schemeClr val="accent4"/>
                 </a:solidFill>
               </a:rPr>
-              <a:t>Источники: vtb.ru — «Комплект МЧД и КЭП» в «ВТБ Бизнес», 10.2026; репозиторий «Мандата» v0.3.0: 782 автотеста, evidence.json от 14.10.2026</a:t>
+              <a:t>Источники: vtb.ru — «Комплект МЧД и КЭП» в «ВТБ Бизнес», 10.2026; репозиторий «Мандата» v0.3.0: 843 автотеста, evidence.json от 14.10.2026</a:t>
             </a:r>
             <a:endParaRPr lang="en-US" sz="1000" dirty="0"/>
           </a:p>
@@ -6956,7 +6956,7 @@
                   <a:schemeClr val="bg1"/>
                 </a:solidFill>
               </a:rPr>
-              <a:t>782 автотеста проходят, каждое число воспроизводится командой</a:t>
+              <a:t>843 автотеста проходят, каждое число воспроизводится командой</a:t>
             </a:r>
             <a:endParaRPr lang="en-US" sz="1500" dirty="0"/>
           </a:p>
@@ -23545,7 +23545,7 @@
                           <a:ea typeface="Calibri" pitchFamily="34" charset="-122"/>
                           <a:cs typeface="Calibri" pitchFamily="34" charset="-120"/>
                         </a:rPr>
-                        <a:t>782 автотеста проходят (v0.3.0, evidence.json), независимая проверка на Cedar, реестр утверждений: каждое число воспроизводится командой</a:t>
+                        <a:t>843 автотеста проходят (v0.3.0, evidence.json), независимая проверка на Cedar, реестр утверждений: каждое число воспроизводится командой</a:t>
                       </a:r>
                       <a:endParaRPr lang="en-US" sz="1300" dirty="0">
                         <a:latin typeface="Calibri" charset="0"/>

--- a/submission/slides/Mandat_VTB.pptx
+++ b/submission/slides/Mandat_VTB.pptx
@@ -133,7 +133,7 @@
   <p:extLst>
     <p:ext uri="{521415D9-36F7-43E2-AB2F-B90AF26B5E84}">
       <p14:sectionLst xmlns:p14="http://schemas.microsoft.com/office/powerpoint/2010/main">
-        <p14:section name="Питч · 5 минут" id="{9770c435-96f5-4b2f-3590-68d222b0a4dc}">
+        <p14:section name="Питч · 5 минут" id="{fcfb8e35-0ca8-951b-6f4b-f5d068a1c836}">
           <p14:sldIdLst>
             <p14:sldId id="256"/>
             <p14:sldId id="257"/>
@@ -151,7 +151,7 @@
             <p14:sldId id="269"/>
           </p14:sldIdLst>
         </p14:section>
-        <p14:section name="Приложение для вопросов жюри" id="{f2cec953-0b8c-b7f2-584f-625c45fc31be}">
+        <p14:section name="Приложение для вопросов жюри" id="{e5022ebd-4817-3d3c-2e1b-ec8adceee6ee}">
           <p14:sldIdLst>
             <p14:sldId id="270"/>
             <p14:sldId id="271"/>
@@ -6093,7 +6093,7 @@
                   <a:schemeClr val="accent4"/>
                 </a:solidFill>
               </a:rPr>
-              <a:t>Источники: vtb.ru — «Комплект МЧД и КЭП» в «ВТБ Бизнес», 10.2026; репозиторий «Мандата» v0.3.0: 843 автотеста, evidence.json от 14.10.2026</a:t>
+              <a:t>Источники: vtb.ru — «Комплект МЧД и КЭП» в «ВТБ Бизнес», 10.2026; репозиторий «Мандата» v0.3.0: 858 автотестов, evidence.json от 14.10.2026</a:t>
             </a:r>
             <a:endParaRPr lang="en-US" sz="1000" dirty="0"/>
           </a:p>
@@ -6956,7 +6956,7 @@
                   <a:schemeClr val="bg1"/>
                 </a:solidFill>
               </a:rPr>
-              <a:t>843 автотеста проходят, каждое число воспроизводится командой</a:t>
+              <a:t>858 автотестов проходят, каждое число воспроизводится командой</a:t>
             </a:r>
             <a:endParaRPr lang="en-US" sz="1500" dirty="0"/>
           </a:p>
@@ -23545,7 +23545,7 @@
                           <a:ea typeface="Calibri" pitchFamily="34" charset="-122"/>
                           <a:cs typeface="Calibri" pitchFamily="34" charset="-120"/>
                         </a:rPr>
-                        <a:t>843 автотеста проходят (v0.3.0, evidence.json), независимая проверка на Cedar, реестр утверждений: каждое число воспроизводится командой</a:t>
+                        <a:t>858 автотестов проходят (v0.3.0, evidence.json), независимая проверка на Cedar, реестр утверждений: каждое число воспроизводится командой</a:t>
                       </a:r>
                       <a:endParaRPr lang="en-US" sz="1300" dirty="0">
                         <a:latin typeface="Calibri" charset="0"/>

--- a/submission/slides/Mandat_VTB.pptx
+++ b/submission/slides/Mandat_VTB.pptx
@@ -133,7 +133,7 @@
   <p:extLst>
     <p:ext uri="{521415D9-36F7-43E2-AB2F-B90AF26B5E84}">
       <p14:sectionLst xmlns:p14="http://schemas.microsoft.com/office/powerpoint/2010/main">
-        <p14:section name="Питч · 5 минут" id="{fcfb8e35-0ca8-951b-6f4b-f5d068a1c836}">
+        <p14:section name="Питч · 5 минут" id="{7e7ced5b-b294-a64f-536f-db0ad63a65ac}">
           <p14:sldIdLst>
             <p14:sldId id="256"/>
             <p14:sldId id="257"/>
@@ -151,7 +151,7 @@
             <p14:sldId id="269"/>
           </p14:sldIdLst>
         </p14:section>
-        <p14:section name="Приложение для вопросов жюри" id="{e5022ebd-4817-3d3c-2e1b-ec8adceee6ee}">
+        <p14:section name="Приложение для вопросов жюри" id="{349a1b66-d1fd-4c3a-005d-a9d95a084287}">
           <p14:sldIdLst>
             <p14:sldId id="270"/>
             <p14:sldId id="271"/>
@@ -6093,7 +6093,7 @@
                   <a:schemeClr val="accent4"/>
                 </a:solidFill>
               </a:rPr>
-              <a:t>Источники: vtb.ru — «Комплект МЧД и КЭП» в «ВТБ Бизнес», 10.2026; репозиторий «Мандата» v0.3.0: 858 автотестов, evidence.json от 14.10.2026</a:t>
+              <a:t>Источники: vtb.ru — «Комплект МЧД и КЭП» в «ВТБ Бизнес», 10.2026; репозиторий «Мандата» v0.3.0: 865 автотестов, evidence.json от 14.10.2026</a:t>
             </a:r>
             <a:endParaRPr lang="en-US" sz="1000" dirty="0"/>
           </a:p>
@@ -6956,7 +6956,7 @@
                   <a:schemeClr val="bg1"/>
                 </a:solidFill>
               </a:rPr>
-              <a:t>858 автотестов проходят, каждое число воспроизводится командой</a:t>
+              <a:t>865 автотестов проходят, каждое число воспроизводится командой</a:t>
             </a:r>
             <a:endParaRPr lang="en-US" sz="1500" dirty="0"/>
           </a:p>
@@ -23545,7 +23545,7 @@
                           <a:ea typeface="Calibri" pitchFamily="34" charset="-122"/>
                           <a:cs typeface="Calibri" pitchFamily="34" charset="-120"/>
                         </a:rPr>
-                        <a:t>858 автотестов проходят (v0.3.0, evidence.json), независимая проверка на Cedar, реестр утверждений: каждое число воспроизводится командой</a:t>
+                        <a:t>865 автотестов проходят (v0.3.0, evidence.json), независимая проверка на Cedar, реестр утверждений: каждое число воспроизводится командой</a:t>
                       </a:r>
                       <a:endParaRPr lang="en-US" sz="1300" dirty="0">
                         <a:latin typeface="Calibri" charset="0"/>

--- a/submission/slides/Mandat_VTB.pptx
+++ b/submission/slides/Mandat_VTB.pptx
@@ -133,7 +133,7 @@
   <p:extLst>
     <p:ext uri="{521415D9-36F7-43E2-AB2F-B90AF26B5E84}">
       <p14:sectionLst xmlns:p14="http://schemas.microsoft.com/office/powerpoint/2010/main">
-        <p14:section name="Питч · 5 минут" id="{7e7ced5b-b294-a64f-536f-db0ad63a65ac}">
+        <p14:section name="Питч · 5 минут" id="{37305143-3b01-8f9a-f487-04bbd0dca965}">
           <p14:sldIdLst>
             <p14:sldId id="256"/>
             <p14:sldId id="257"/>
@@ -151,7 +151,7 @@
             <p14:sldId id="269"/>
           </p14:sldIdLst>
         </p14:section>
-        <p14:section name="Приложение для вопросов жюри" id="{349a1b66-d1fd-4c3a-005d-a9d95a084287}">
+        <p14:section name="Приложение для вопросов жюри" id="{68c3a76b-b1b4-eda4-2adb-cc3218d8be7d}">
           <p14:sldIdLst>
             <p14:sldId id="270"/>
             <p14:sldId id="271"/>

--- a/submission/slides/Mandat_VTB.pptx
+++ b/submission/slides/Mandat_VTB.pptx
@@ -134,7 +134,7 @@
   <p:extLst>
     <p:ext uri="{521415D9-36F7-43E2-AB2F-B90AF26B5E84}">
       <p14:sectionLst xmlns:p14="http://schemas.microsoft.com/office/powerpoint/2010/main">
-        <p14:section name="Питч · 5 минут" id="{5a462cf0-9153-9a8d-6d21-d4fb6511e949}">
+        <p14:section name="Питч · 5 минут" id="{3df47ef4-420e-6e95-a2e3-4b3b67f10f52}">
           <p14:sldIdLst>
             <p14:sldId id="256"/>
             <p14:sldId id="257"/>
@@ -152,7 +152,7 @@
             <p14:sldId id="269"/>
           </p14:sldIdLst>
         </p14:section>
-        <p14:section name="Приложение для вопросов жюри" id="{769ae120-6d54-edac-92a0-07f3dbe558e4}">
+        <p14:section name="Приложение для вопросов жюри" id="{048acd47-2ab3-4332-e2e4-e8823dc6d38f}">
           <p14:sldIdLst>
             <p14:sldId id="270"/>
             <p14:sldId id="271"/>
@@ -6183,7 +6183,7 @@
                   <a:schemeClr val="accent4"/>
                 </a:solidFill>
               </a:rPr>
-              <a:t>Источники: vtb.ru — «Комплект МЧД и КЭП» в «ВТБ Бизнес», 10.2026; репозиторий «Мандата» v0.3.0: 869 автотестов, evidence.json от 14.10.2026</a:t>
+              <a:t>Источники: vtb.ru — «Комплект МЧД и КЭП» в «ВТБ Бизнес», 10.2026; репозиторий «Мандата» v0.3.0: 872 автотеста, evidence.json от 15.10.2026</a:t>
             </a:r>
             <a:endParaRPr lang="en-US" sz="1000" dirty="0"/>
           </a:p>
@@ -7046,7 +7046,7 @@
                   <a:schemeClr val="bg1"/>
                 </a:solidFill>
               </a:rPr>
-              <a:t>869 автотестов проходят, каждое число воспроизводится командой</a:t>
+              <a:t>872 автотеста проходят, каждое число воспроизводится командой</a:t>
             </a:r>
             <a:endParaRPr lang="en-US" sz="1500" dirty="0"/>
           </a:p>
@@ -12430,7 +12430,7 @@
                           <a:ea typeface="Calibri" pitchFamily="34" charset="-122"/>
                           <a:cs typeface="Calibri" pitchFamily="34" charset="-120"/>
                         </a:rPr>
-                        <a:t>869 автотестов; evidence.json</a:t>
+                        <a:t>872 автотестов; evidence.json</a:t>
                       </a:r>
                       <a:endParaRPr lang="en-US" sz="1400" dirty="0">
                         <a:latin typeface="Calibri" charset="0"/>
@@ -25390,7 +25390,7 @@
                           <a:ea typeface="Calibri" pitchFamily="34" charset="-122"/>
                           <a:cs typeface="Calibri" pitchFamily="34" charset="-120"/>
                         </a:rPr>
-                        <a:t>869 автотестов проходят (v0.3.0, evidence.json), независимая проверка на Cedar, реестр утверждений: каждое число воспроизводится командой</a:t>
+                        <a:t>872 автотеста проходят (v0.3.0, evidence.json), независимая проверка на Cedar, реестр утверждений: каждое число воспроизводится командой</a:t>
                       </a:r>
                       <a:endParaRPr lang="en-US" sz="1300" dirty="0">
                         <a:latin typeface="Calibri" charset="0"/>
@@ -33386,7 +33386,7 @@
                   <a:schemeClr val="accent4"/>
                 </a:solidFill>
               </a:rPr>
-              <a:t>Воспроизводится: mandat eval --per-defect 6; python -m pytest tests/test_properties.py tests/test_cedar.py; python scripts/bench.py → evidence.json (14.10.2026, v0.3.0)</a:t>
+              <a:t>Воспроизводится: mandat eval --per-defect 6; python -m pytest tests/test_properties.py tests/test_cedar.py; python scripts/bench.py → evidence.json (15.10.2026, v0.3.0)</a:t>
             </a:r>
             <a:endParaRPr lang="en-US" sz="1000" dirty="0"/>
           </a:p>
@@ -33774,7 +33774,7 @@
                   <a:schemeClr val="accent1"/>
                 </a:solidFill>
               </a:rPr>
-              <a:t>≈2 мс</a:t>
+              <a:t>≈1 мс</a:t>
             </a:r>
             <a:endParaRPr lang="en-US" sz="3000" dirty="0"/>
           </a:p>

--- a/submission/slides/Mandat_VTB.pptx
+++ b/submission/slides/Mandat_VTB.pptx
@@ -134,7 +134,7 @@
   <p:extLst>
     <p:ext uri="{521415D9-36F7-43E2-AB2F-B90AF26B5E84}">
       <p14:sectionLst xmlns:p14="http://schemas.microsoft.com/office/powerpoint/2010/main">
-        <p14:section name="Питч · 5 минут" id="{3df47ef4-420e-6e95-a2e3-4b3b67f10f52}">
+        <p14:section name="Питч · 5 минут" id="{bf049bfa-fff5-51ef-4412-d1d630dbd9dd}">
           <p14:sldIdLst>
             <p14:sldId id="256"/>
             <p14:sldId id="257"/>
@@ -152,7 +152,7 @@
             <p14:sldId id="269"/>
           </p14:sldIdLst>
         </p14:section>
-        <p14:section name="Приложение для вопросов жюри" id="{048acd47-2ab3-4332-e2e4-e8823dc6d38f}">
+        <p14:section name="Приложение для вопросов жюри" id="{9d0f4b84-f520-30d7-0002-57ae94ba881e}">
           <p14:sldIdLst>
             <p14:sldId id="270"/>
             <p14:sldId id="271"/>
@@ -6183,7 +6183,7 @@
                   <a:schemeClr val="accent4"/>
                 </a:solidFill>
               </a:rPr>
-              <a:t>Источники: vtb.ru — «Комплект МЧД и КЭП» в «ВТБ Бизнес», 10.2026; репозиторий «Мандата» v0.3.0: 872 автотеста, evidence.json от 15.10.2026</a:t>
+              <a:t>Источники: vtb.ru — «Комплект МЧД и КЭП» в «ВТБ Бизнес», 10.2026; репозиторий «Мандата» v0.3.0: 878 автотестов, evidence.json от 15.10.2026</a:t>
             </a:r>
             <a:endParaRPr lang="en-US" sz="1000" dirty="0"/>
           </a:p>
@@ -7046,7 +7046,7 @@
                   <a:schemeClr val="bg1"/>
                 </a:solidFill>
               </a:rPr>
-              <a:t>872 автотеста проходят, каждое число воспроизводится командой</a:t>
+              <a:t>878 автотестов проходят, каждое число воспроизводится командой</a:t>
             </a:r>
             <a:endParaRPr lang="en-US" sz="1500" dirty="0"/>
           </a:p>
@@ -12430,7 +12430,7 @@
                           <a:ea typeface="Calibri" pitchFamily="34" charset="-122"/>
                           <a:cs typeface="Calibri" pitchFamily="34" charset="-120"/>
                         </a:rPr>
-                        <a:t>872 автотестов; evidence.json</a:t>
+                        <a:t>878 автотестов; evidence.json</a:t>
                       </a:r>
                       <a:endParaRPr lang="en-US" sz="1400" dirty="0">
                         <a:latin typeface="Calibri" charset="0"/>
@@ -25390,7 +25390,7 @@
                           <a:ea typeface="Calibri" pitchFamily="34" charset="-122"/>
                           <a:cs typeface="Calibri" pitchFamily="34" charset="-120"/>
                         </a:rPr>
-                        <a:t>872 автотеста проходят (v0.3.0, evidence.json), независимая проверка на Cedar, реестр утверждений: каждое число воспроизводится командой</a:t>
+                        <a:t>878 автотестов проходят (v0.3.0, evidence.json), независимая проверка на Cedar, реестр утверждений: каждое число воспроизводится командой</a:t>
                       </a:r>
                       <a:endParaRPr lang="en-US" sz="1300" dirty="0">
                         <a:latin typeface="Calibri" charset="0"/>
@@ -33774,7 +33774,7 @@
                   <a:schemeClr val="accent1"/>
                 </a:solidFill>
               </a:rPr>
-              <a:t>≈1 мс</a:t>
+              <a:t>≈2 мс</a:t>
             </a:r>
             <a:endParaRPr lang="en-US" sz="3000" dirty="0"/>
           </a:p>

--- a/submission/slides/Mandat_VTB.pptx
+++ b/submission/slides/Mandat_VTB.pptx
@@ -134,7 +134,7 @@
   <p:extLst>
     <p:ext uri="{521415D9-36F7-43E2-AB2F-B90AF26B5E84}">
       <p14:sectionLst xmlns:p14="http://schemas.microsoft.com/office/powerpoint/2010/main">
-        <p14:section name="Питч · 5 минут" id="{bf049bfa-fff5-51ef-4412-d1d630dbd9dd}">
+        <p14:section name="Питч · 5 минут" id="{4693a4b6-3a05-6f31-48a7-615288a39605}">
           <p14:sldIdLst>
             <p14:sldId id="256"/>
             <p14:sldId id="257"/>
@@ -152,7 +152,7 @@
             <p14:sldId id="269"/>
           </p14:sldIdLst>
         </p14:section>
-        <p14:section name="Приложение для вопросов жюри" id="{9d0f4b84-f520-30d7-0002-57ae94ba881e}">
+        <p14:section name="Приложение для вопросов жюри" id="{22ce0d31-22ab-9efa-fc1c-08ab3f32df5e}">
           <p14:sldIdLst>
             <p14:sldId id="270"/>
             <p14:sldId id="271"/>
@@ -6183,7 +6183,7 @@
                   <a:schemeClr val="accent4"/>
                 </a:solidFill>
               </a:rPr>
-              <a:t>Источники: vtb.ru — «Комплект МЧД и КЭП» в «ВТБ Бизнес», 10.2026; репозиторий «Мандата» v0.3.0: 878 автотестов, evidence.json от 15.10.2026</a:t>
+              <a:t>Источники: vtb.ru — «Комплект МЧД и КЭП» в «ВТБ Бизнес», 10.2026; репозиторий «Мандата» v0.3.0: 936 автотестов, evidence.json от 15.10.2026</a:t>
             </a:r>
             <a:endParaRPr lang="en-US" sz="1000" dirty="0"/>
           </a:p>
@@ -7046,7 +7046,7 @@
                   <a:schemeClr val="bg1"/>
                 </a:solidFill>
               </a:rPr>
-              <a:t>878 автотестов проходят, каждое число воспроизводится командой</a:t>
+              <a:t>936 автотестов проходят, каждое число воспроизводится командой</a:t>
             </a:r>
             <a:endParaRPr lang="en-US" sz="1500" dirty="0"/>
           </a:p>
@@ -12430,7 +12430,7 @@
                           <a:ea typeface="Calibri" pitchFamily="34" charset="-122"/>
                           <a:cs typeface="Calibri" pitchFamily="34" charset="-120"/>
                         </a:rPr>
-                        <a:t>878 автотестов; evidence.json</a:t>
+                        <a:t>936 автотестов; evidence.json</a:t>
                       </a:r>
                       <a:endParaRPr lang="en-US" sz="1400" dirty="0">
                         <a:latin typeface="Calibri" charset="0"/>
@@ -25390,7 +25390,7 @@
                           <a:ea typeface="Calibri" pitchFamily="34" charset="-122"/>
                           <a:cs typeface="Calibri" pitchFamily="34" charset="-120"/>
                         </a:rPr>
-                        <a:t>878 автотестов проходят (v0.3.0, evidence.json), независимая проверка на Cedar, реестр утверждений: каждое число воспроизводится командой</a:t>
+                        <a:t>936 автотестов проходят (v0.3.0, evidence.json), независимая проверка на Cedar, реестр утверждений: каждое число воспроизводится командой</a:t>
                       </a:r>
                       <a:endParaRPr lang="en-US" sz="1300" dirty="0">
                         <a:latin typeface="Calibri" charset="0"/>

--- a/submission/slides/Mandat_VTB.pptx
+++ b/submission/slides/Mandat_VTB.pptx
@@ -134,7 +134,7 @@
   <p:extLst>
     <p:ext uri="{521415D9-36F7-43E2-AB2F-B90AF26B5E84}">
       <p14:sectionLst xmlns:p14="http://schemas.microsoft.com/office/powerpoint/2010/main">
-        <p14:section name="Питч · 5 минут" id="{4693a4b6-3a05-6f31-48a7-615288a39605}">
+        <p14:section name="Питч · 5 минут" id="{68189738-29d8-23c7-6350-7c6dc1c865a7}">
           <p14:sldIdLst>
             <p14:sldId id="256"/>
             <p14:sldId id="257"/>
@@ -152,7 +152,7 @@
             <p14:sldId id="269"/>
           </p14:sldIdLst>
         </p14:section>
-        <p14:section name="Приложение для вопросов жюри" id="{22ce0d31-22ab-9efa-fc1c-08ab3f32df5e}">
+        <p14:section name="Приложение для вопросов жюри" id="{804d4a08-8f5b-8cbb-c992-948a533acc80}">
           <p14:sldIdLst>
             <p14:sldId id="270"/>
             <p14:sldId id="271"/>
@@ -6183,7 +6183,7 @@
                   <a:schemeClr val="accent4"/>
                 </a:solidFill>
               </a:rPr>
-              <a:t>Источники: vtb.ru — «Комплект МЧД и КЭП» в «ВТБ Бизнес», 10.2026; репозиторий «Мандата» v0.3.0: 936 автотестов, evidence.json от 15.10.2026</a:t>
+              <a:t>Источники: vtb.ru — «Комплект МЧД и КЭП» в «ВТБ Бизнес», 10.2026; репозиторий «Мандата» v0.3.0: 945 автотестов, evidence.json от 15.10.2026</a:t>
             </a:r>
             <a:endParaRPr lang="en-US" sz="1000" dirty="0"/>
           </a:p>
@@ -7046,7 +7046,7 @@
                   <a:schemeClr val="bg1"/>
                 </a:solidFill>
               </a:rPr>
-              <a:t>936 автотестов проходят, каждое число воспроизводится командой</a:t>
+              <a:t>945 автотестов проходят, каждое число воспроизводится командой</a:t>
             </a:r>
             <a:endParaRPr lang="en-US" sz="1500" dirty="0"/>
           </a:p>
@@ -12430,7 +12430,7 @@
                           <a:ea typeface="Calibri" pitchFamily="34" charset="-122"/>
                           <a:cs typeface="Calibri" pitchFamily="34" charset="-120"/>
                         </a:rPr>
-                        <a:t>936 автотестов; evidence.json</a:t>
+                        <a:t>945 автотестов; evidence.json</a:t>
                       </a:r>
                       <a:endParaRPr lang="en-US" sz="1400" dirty="0">
                         <a:latin typeface="Calibri" charset="0"/>
@@ -25390,7 +25390,7 @@
                           <a:ea typeface="Calibri" pitchFamily="34" charset="-122"/>
                           <a:cs typeface="Calibri" pitchFamily="34" charset="-120"/>
                         </a:rPr>
-                        <a:t>936 автотестов проходят (v0.3.0, evidence.json), независимая проверка на Cedar, реестр утверждений: каждое число воспроизводится командой</a:t>
+                        <a:t>945 автотестов проходят (v0.3.0, evidence.json), независимая проверка на Cedar, реестр утверждений: каждое число воспроизводится командой</a:t>
                       </a:r>
                       <a:endParaRPr lang="en-US" sz="1300" dirty="0">
                         <a:latin typeface="Calibri" charset="0"/>

--- a/submission/slides/Mandat_VTB.pptx
+++ b/submission/slides/Mandat_VTB.pptx
@@ -134,7 +134,7 @@
   <p:extLst>
     <p:ext uri="{521415D9-36F7-43E2-AB2F-B90AF26B5E84}">
       <p14:sectionLst xmlns:p14="http://schemas.microsoft.com/office/powerpoint/2010/main">
-        <p14:section name="Питч · 5 минут" id="{bf049bfa-fff5-51ef-4412-d1d630dbd9dd}">
+        <p14:section name="Питч · 5 минут" id="{68189738-29d8-23c7-6350-7c6dc1c865a7}">
           <p14:sldIdLst>
             <p14:sldId id="256"/>
             <p14:sldId id="257"/>
@@ -152,7 +152,7 @@
             <p14:sldId id="269"/>
           </p14:sldIdLst>
         </p14:section>
-        <p14:section name="Приложение для вопросов жюри" id="{9d0f4b84-f520-30d7-0002-57ae94ba881e}">
+        <p14:section name="Приложение для вопросов жюри" id="{804d4a08-8f5b-8cbb-c992-948a533acc80}">
           <p14:sldIdLst>
             <p14:sldId id="270"/>
             <p14:sldId id="271"/>
@@ -6183,7 +6183,7 @@
                   <a:schemeClr val="accent4"/>
                 </a:solidFill>
               </a:rPr>
-              <a:t>Источники: vtb.ru — «Комплект МЧД и КЭП» в «ВТБ Бизнес», 10.2026; репозиторий «Мандата» v0.3.0: 878 автотестов, evidence.json от 15.10.2026</a:t>
+              <a:t>Источники: vtb.ru — «Комплект МЧД и КЭП» в «ВТБ Бизнес», 10.2026; репозиторий «Мандата» v0.3.0: 945 автотестов, evidence.json от 15.10.2026</a:t>
             </a:r>
             <a:endParaRPr lang="en-US" sz="1000" dirty="0"/>
           </a:p>
@@ -7046,7 +7046,7 @@
                   <a:schemeClr val="bg1"/>
                 </a:solidFill>
               </a:rPr>
-              <a:t>878 автотестов проходят, каждое число воспроизводится командой</a:t>
+              <a:t>945 автотестов проходят, каждое число воспроизводится командой</a:t>
             </a:r>
             <a:endParaRPr lang="en-US" sz="1500" dirty="0"/>
           </a:p>
@@ -12430,7 +12430,7 @@
                           <a:ea typeface="Calibri" pitchFamily="34" charset="-122"/>
                           <a:cs typeface="Calibri" pitchFamily="34" charset="-120"/>
                         </a:rPr>
-                        <a:t>878 автотестов; evidence.json</a:t>
+                        <a:t>945 автотестов; evidence.json</a:t>
                       </a:r>
                       <a:endParaRPr lang="en-US" sz="1400" dirty="0">
                         <a:latin typeface="Calibri" charset="0"/>
@@ -25390,7 +25390,7 @@
                           <a:ea typeface="Calibri" pitchFamily="34" charset="-122"/>
                           <a:cs typeface="Calibri" pitchFamily="34" charset="-120"/>
                         </a:rPr>
-                        <a:t>878 автотестов проходят (v0.3.0, evidence.json), независимая проверка на Cedar, реестр утверждений: каждое число воспроизводится командой</a:t>
+                        <a:t>945 автотестов проходят (v0.3.0, evidence.json), независимая проверка на Cedar, реестр утверждений: каждое число воспроизводится командой</a:t>
                       </a:r>
                       <a:endParaRPr lang="en-US" sz="1300" dirty="0">
                         <a:latin typeface="Calibri" charset="0"/>

--- a/submission/slides/Mandat_VTB.pptx
+++ b/submission/slides/Mandat_VTB.pptx
@@ -134,7 +134,7 @@
   <p:extLst>
     <p:ext uri="{521415D9-36F7-43E2-AB2F-B90AF26B5E84}">
       <p14:sectionLst xmlns:p14="http://schemas.microsoft.com/office/powerpoint/2010/main">
-        <p14:section name="Питч · 5 минут" id="{68189738-29d8-23c7-6350-7c6dc1c865a7}">
+        <p14:section name="Питч · 5 минут" id="{d18d559b-aa83-6f86-e8b6-f96edbe0e93b}">
           <p14:sldIdLst>
             <p14:sldId id="256"/>
             <p14:sldId id="257"/>
@@ -152,7 +152,7 @@
             <p14:sldId id="269"/>
           </p14:sldIdLst>
         </p14:section>
-        <p14:section name="Приложение для вопросов жюри" id="{804d4a08-8f5b-8cbb-c992-948a533acc80}">
+        <p14:section name="Приложение для вопросов жюри" id="{2e56231e-05e3-792c-ddcc-e3169e5f4541}">
           <p14:sldIdLst>
             <p14:sldId id="270"/>
             <p14:sldId id="271"/>
@@ -6183,7 +6183,7 @@
                   <a:schemeClr val="accent4"/>
                 </a:solidFill>
               </a:rPr>
-              <a:t>Источники: vtb.ru — «Комплект МЧД и КЭП» в «ВТБ Бизнес», 10.2026; репозиторий «Мандата» v0.3.0: 945 автотестов, evidence.json от 15.10.2026</a:t>
+              <a:t>Источники: vtb.ru — «Комплект МЧД и КЭП» в «ВТБ Бизнес», 10.2026; репозиторий «Мандата» v0.3.0: 960 автотестов, evidence.json от 15.10.2026</a:t>
             </a:r>
             <a:endParaRPr lang="en-US" sz="1000" dirty="0"/>
           </a:p>
@@ -7046,7 +7046,7 @@
                   <a:schemeClr val="bg1"/>
                 </a:solidFill>
               </a:rPr>
-              <a:t>945 автотестов проходят, каждое число воспроизводится командой</a:t>
+              <a:t>960 автотестов проходят, каждое число воспроизводится командой</a:t>
             </a:r>
             <a:endParaRPr lang="en-US" sz="1500" dirty="0"/>
           </a:p>
@@ -12430,7 +12430,7 @@
                           <a:ea typeface="Calibri" pitchFamily="34" charset="-122"/>
                           <a:cs typeface="Calibri" pitchFamily="34" charset="-120"/>
                         </a:rPr>
-                        <a:t>945 автотестов; evidence.json</a:t>
+                        <a:t>960 автотестов; evidence.json</a:t>
                       </a:r>
                       <a:endParaRPr lang="en-US" sz="1400" dirty="0">
                         <a:latin typeface="Calibri" charset="0"/>
@@ -25390,7 +25390,7 @@
                           <a:ea typeface="Calibri" pitchFamily="34" charset="-122"/>
                           <a:cs typeface="Calibri" pitchFamily="34" charset="-120"/>
                         </a:rPr>
-                        <a:t>945 автотестов проходят (v0.3.0, evidence.json), независимая проверка на Cedar, реестр утверждений: каждое число воспроизводится командой</a:t>
+                        <a:t>960 автотестов проходят (v0.3.0, evidence.json), независимая проверка на Cedar, реестр утверждений: каждое число воспроизводится командой</a:t>
                       </a:r>
                       <a:endParaRPr lang="en-US" sz="1300" dirty="0">
                         <a:latin typeface="Calibri" charset="0"/>

--- a/submission/slides/Mandat_VTB.pptx
+++ b/submission/slides/Mandat_VTB.pptx
@@ -134,7 +134,7 @@
   <p:extLst>
     <p:ext uri="{521415D9-36F7-43E2-AB2F-B90AF26B5E84}">
       <p14:sectionLst xmlns:p14="http://schemas.microsoft.com/office/powerpoint/2010/main">
-        <p14:section name="Питч · 5 минут" id="{d18d559b-aa83-6f86-e8b6-f96edbe0e93b}">
+        <p14:section name="Питч · 5 минут" id="{a9219409-316c-49ef-ba47-e716a756a317}">
           <p14:sldIdLst>
             <p14:sldId id="256"/>
             <p14:sldId id="257"/>
@@ -152,7 +152,7 @@
             <p14:sldId id="269"/>
           </p14:sldIdLst>
         </p14:section>
-        <p14:section name="Приложение для вопросов жюри" id="{2e56231e-05e3-792c-ddcc-e3169e5f4541}">
+        <p14:section name="Приложение для вопросов жюри" id="{2a89f822-9bc9-6891-0459-870cdbc324e8}">
           <p14:sldIdLst>
             <p14:sldId id="270"/>
             <p14:sldId id="271"/>
@@ -6183,7 +6183,7 @@
                   <a:schemeClr val="accent4"/>
                 </a:solidFill>
               </a:rPr>
-              <a:t>Источники: vtb.ru — «Комплект МЧД и КЭП» в «ВТБ Бизнес», 10.2026; репозиторий «Мандата» v0.3.0: 960 автотестов, evidence.json от 15.10.2026</a:t>
+              <a:t>Источники: vtb.ru — «Комплект МЧД и КЭП» в «ВТБ Бизнес», 10.2026; репозиторий «Мандата» v0.3.0: 993 автотеста, evidence.json от 15.10.2026</a:t>
             </a:r>
             <a:endParaRPr lang="en-US" sz="1000" dirty="0"/>
           </a:p>
@@ -7046,7 +7046,7 @@
                   <a:schemeClr val="bg1"/>
                 </a:solidFill>
               </a:rPr>
-              <a:t>960 автотестов проходят, каждое число воспроизводится командой</a:t>
+              <a:t>993 автотеста проходят, каждое число воспроизводится командой</a:t>
             </a:r>
             <a:endParaRPr lang="en-US" sz="1500" dirty="0"/>
           </a:p>
@@ -12430,7 +12430,7 @@
                           <a:ea typeface="Calibri" pitchFamily="34" charset="-122"/>
                           <a:cs typeface="Calibri" pitchFamily="34" charset="-120"/>
                         </a:rPr>
-                        <a:t>960 автотестов; evidence.json</a:t>
+                        <a:t>993 автотестов; evidence.json</a:t>
                       </a:r>
                       <a:endParaRPr lang="en-US" sz="1400" dirty="0">
                         <a:latin typeface="Calibri" charset="0"/>
@@ -25390,7 +25390,7 @@
                           <a:ea typeface="Calibri" pitchFamily="34" charset="-122"/>
                           <a:cs typeface="Calibri" pitchFamily="34" charset="-120"/>
                         </a:rPr>
-                        <a:t>960 автотестов проходят (v0.3.0, evidence.json), независимая проверка на Cedar, реестр утверждений: каждое число воспроизводится командой</a:t>
+                        <a:t>993 автотеста проходят (v0.3.0, evidence.json), независимая проверка на Cedar, реестр утверждений: каждое число воспроизводится командой</a:t>
                       </a:r>
                       <a:endParaRPr lang="en-US" sz="1300" dirty="0">
                         <a:latin typeface="Calibri" charset="0"/>

--- a/submission/slides/Mandat_VTB.pptx
+++ b/submission/slides/Mandat_VTB.pptx
@@ -134,7 +134,7 @@
   <p:extLst>
     <p:ext uri="{521415D9-36F7-43E2-AB2F-B90AF26B5E84}">
       <p14:sectionLst xmlns:p14="http://schemas.microsoft.com/office/powerpoint/2010/main">
-        <p14:section name="Питч · 5 минут" id="{a9219409-316c-49ef-ba47-e716a756a317}">
+        <p14:section name="Питч · 5 минут" id="{f5813c45-1264-a1ef-b8f5-95890cb31b5b}">
           <p14:sldIdLst>
             <p14:sldId id="256"/>
             <p14:sldId id="257"/>
@@ -152,7 +152,7 @@
             <p14:sldId id="269"/>
           </p14:sldIdLst>
         </p14:section>
-        <p14:section name="Приложение для вопросов жюри" id="{2a89f822-9bc9-6891-0459-870cdbc324e8}">
+        <p14:section name="Приложение для вопросов жюри" id="{ce7bd8d7-9c2a-59a4-364f-877f447b8a6d}">
           <p14:sldIdLst>
             <p14:sldId id="270"/>
             <p14:sldId id="271"/>

--- a/submission/slides/Mandat_VTB.pptx
+++ b/submission/slides/Mandat_VTB.pptx
@@ -134,7 +134,7 @@
   <p:extLst>
     <p:ext uri="{521415D9-36F7-43E2-AB2F-B90AF26B5E84}">
       <p14:sectionLst xmlns:p14="http://schemas.microsoft.com/office/powerpoint/2010/main">
-        <p14:section name="Питч · 5 минут" id="{f5813c45-1264-a1ef-b8f5-95890cb31b5b}">
+        <p14:section name="Питч · 5 минут" id="{53f84952-d4a6-e0f5-c745-1046f85e0ecb}">
           <p14:sldIdLst>
             <p14:sldId id="256"/>
             <p14:sldId id="257"/>
@@ -152,7 +152,7 @@
             <p14:sldId id="269"/>
           </p14:sldIdLst>
         </p14:section>
-        <p14:section name="Приложение для вопросов жюри" id="{ce7bd8d7-9c2a-59a4-364f-877f447b8a6d}">
+        <p14:section name="Приложение для вопросов жюри" id="{a4864a79-edce-468e-816a-75f280244ecb}">
           <p14:sldIdLst>
             <p14:sldId id="270"/>
             <p14:sldId id="271"/>
@@ -6183,7 +6183,7 @@
                   <a:schemeClr val="accent4"/>
                 </a:solidFill>
               </a:rPr>
-              <a:t>Источники: vtb.ru — «Комплект МЧД и КЭП» в «ВТБ Бизнес», 10.2026; репозиторий «Мандата» v0.3.0: 993 автотеста, evidence.json от 15.10.2026</a:t>
+              <a:t>Источники: vtb.ru — «Комплект МЧД и КЭП» в «ВТБ Бизнес», 10.2026; репозиторий «Мандата» v0.3.0: 1000 автотестов, evidence.json от 15.10.2026</a:t>
             </a:r>
             <a:endParaRPr lang="en-US" sz="1000" dirty="0"/>
           </a:p>
@@ -7046,7 +7046,7 @@
                   <a:schemeClr val="bg1"/>
                 </a:solidFill>
               </a:rPr>
-              <a:t>993 автотеста проходят, каждое число воспроизводится командой</a:t>
+              <a:t>1000 автотестов проходят, каждое число воспроизводится командой</a:t>
             </a:r>
             <a:endParaRPr lang="en-US" sz="1500" dirty="0"/>
           </a:p>
@@ -12430,7 +12430,7 @@
                           <a:ea typeface="Calibri" pitchFamily="34" charset="-122"/>
                           <a:cs typeface="Calibri" pitchFamily="34" charset="-120"/>
                         </a:rPr>
-                        <a:t>993 автотестов; evidence.json</a:t>
+                        <a:t>1000 автотестов; evidence.json</a:t>
                       </a:r>
                       <a:endParaRPr lang="en-US" sz="1400" dirty="0">
                         <a:latin typeface="Calibri" charset="0"/>
@@ -25390,7 +25390,7 @@
                           <a:ea typeface="Calibri" pitchFamily="34" charset="-122"/>
                           <a:cs typeface="Calibri" pitchFamily="34" charset="-120"/>
                         </a:rPr>
-                        <a:t>993 автотеста проходят (v0.3.0, evidence.json), независимая проверка на Cedar, реестр утверждений: каждое число воспроизводится командой</a:t>
+                        <a:t>1000 автотестов проходят (v0.3.0, evidence.json), независимая проверка на Cedar, реестр утверждений: каждое число воспроизводится командой</a:t>
                       </a:r>
                       <a:endParaRPr lang="en-US" sz="1300" dirty="0">
                         <a:latin typeface="Calibri" charset="0"/>

--- a/submission/slides/Mandat_VTB.pptx
+++ b/submission/slides/Mandat_VTB.pptx
@@ -134,7 +134,7 @@
   <p:extLst>
     <p:ext uri="{521415D9-36F7-43E2-AB2F-B90AF26B5E84}">
       <p14:sectionLst xmlns:p14="http://schemas.microsoft.com/office/powerpoint/2010/main">
-        <p14:section name="Питч · 5 минут" id="{53f84952-d4a6-e0f5-c745-1046f85e0ecb}">
+        <p14:section name="Питч · 5 минут" id="{5674b779-a378-4a4d-66f2-f4d49f20a8ce}">
           <p14:sldIdLst>
             <p14:sldId id="256"/>
             <p14:sldId id="257"/>
@@ -152,7 +152,7 @@
             <p14:sldId id="269"/>
           </p14:sldIdLst>
         </p14:section>
-        <p14:section name="Приложение для вопросов жюри" id="{a4864a79-edce-468e-816a-75f280244ecb}">
+        <p14:section name="Приложение для вопросов жюри" id="{2557e5a9-74e6-1c1f-6b8a-a783ba2f5bff}">
           <p14:sldIdLst>
             <p14:sldId id="270"/>
             <p14:sldId id="271"/>
@@ -6183,7 +6183,7 @@
                   <a:schemeClr val="accent4"/>
                 </a:solidFill>
               </a:rPr>
-              <a:t>Источники: vtb.ru — «Комплект МЧД и КЭП» в «ВТБ Бизнес», 10.2026; репозиторий «Мандата» v0.3.0: 1000 автотестов, evidence.json от 15.10.2026</a:t>
+              <a:t>Источники: vtb.ru — «Комплект МЧД и КЭП» в «ВТБ Бизнес», 10.2026; репозиторий «Мандата» v0.3.0: 1013 автотестов, evidence.json от 15.10.2026</a:t>
             </a:r>
             <a:endParaRPr lang="en-US" sz="1000" dirty="0"/>
           </a:p>
@@ -7046,7 +7046,7 @@
                   <a:schemeClr val="bg1"/>
                 </a:solidFill>
               </a:rPr>
-              <a:t>1000 автотестов проходят, каждое число воспроизводится командой</a:t>
+              <a:t>1013 автотестов проходят, каждое число воспроизводится командой</a:t>
             </a:r>
             <a:endParaRPr lang="en-US" sz="1500" dirty="0"/>
           </a:p>
@@ -12430,7 +12430,7 @@
                           <a:ea typeface="Calibri" pitchFamily="34" charset="-122"/>
                           <a:cs typeface="Calibri" pitchFamily="34" charset="-120"/>
                         </a:rPr>
-                        <a:t>1000 автотестов; evidence.json</a:t>
+                        <a:t>1013 автотестов; evidence.json</a:t>
                       </a:r>
                       <a:endParaRPr lang="en-US" sz="1400" dirty="0">
                         <a:latin typeface="Calibri" charset="0"/>
@@ -25390,7 +25390,7 @@
                           <a:ea typeface="Calibri" pitchFamily="34" charset="-122"/>
                           <a:cs typeface="Calibri" pitchFamily="34" charset="-120"/>
                         </a:rPr>
-                        <a:t>1000 автотестов проходят (v0.3.0, evidence.json), независимая проверка на Cedar, реестр утверждений: каждое число воспроизводится командой</a:t>
+                        <a:t>1013 автотестов проходят (v0.3.0, evidence.json), независимая проверка на Cedar, реестр утверждений: каждое число воспроизводится командой</a:t>
                       </a:r>
                       <a:endParaRPr lang="en-US" sz="1300" dirty="0">
                         <a:latin typeface="Calibri" charset="0"/>

--- a/submission/slides/Mandat_VTB.pptx
+++ b/submission/slides/Mandat_VTB.pptx
@@ -134,7 +134,7 @@
   <p:extLst>
     <p:ext uri="{521415D9-36F7-43E2-AB2F-B90AF26B5E84}">
       <p14:sectionLst xmlns:p14="http://schemas.microsoft.com/office/powerpoint/2010/main">
-        <p14:section name="Питч · 5 минут" id="{5674b779-a378-4a4d-66f2-f4d49f20a8ce}">
+        <p14:section name="Питч · 5 минут" id="{9d780934-b275-b381-c6c7-c7c5da043ce9}">
           <p14:sldIdLst>
             <p14:sldId id="256"/>
             <p14:sldId id="257"/>
@@ -152,7 +152,7 @@
             <p14:sldId id="269"/>
           </p14:sldIdLst>
         </p14:section>
-        <p14:section name="Приложение для вопросов жюри" id="{2557e5a9-74e6-1c1f-6b8a-a783ba2f5bff}">
+        <p14:section name="Приложение для вопросов жюри" id="{2fdc41bd-a6fc-1370-6260-2713234563aa}">
           <p14:sldIdLst>
             <p14:sldId id="270"/>
             <p14:sldId id="271"/>
@@ -6183,7 +6183,7 @@
                   <a:schemeClr val="accent4"/>
                 </a:solidFill>
               </a:rPr>
-              <a:t>Источники: vtb.ru — «Комплект МЧД и КЭП» в «ВТБ Бизнес», 10.2026; репозиторий «Мандата» v0.3.0: 1013 автотестов, evidence.json от 15.10.2026</a:t>
+              <a:t>Источники: vtb.ru — «Комплект МЧД и КЭП» в «ВТБ Бизнес», 10.2026; репозиторий «Мандата» v0.3.0: 1017 автотестов, evidence.json от 15.10.2026</a:t>
             </a:r>
             <a:endParaRPr lang="en-US" sz="1000" dirty="0"/>
           </a:p>
@@ -7046,7 +7046,7 @@
                   <a:schemeClr val="bg1"/>
                 </a:solidFill>
               </a:rPr>
-              <a:t>1013 автотестов проходят, каждое число воспроизводится командой</a:t>
+              <a:t>1017 автотестов проходят, каждое число воспроизводится командой</a:t>
             </a:r>
             <a:endParaRPr lang="en-US" sz="1500" dirty="0"/>
           </a:p>
@@ -12430,7 +12430,7 @@
                           <a:ea typeface="Calibri" pitchFamily="34" charset="-122"/>
                           <a:cs typeface="Calibri" pitchFamily="34" charset="-120"/>
                         </a:rPr>
-                        <a:t>1013 автотестов; evidence.json</a:t>
+                        <a:t>1017 автотестов; evidence.json</a:t>
                       </a:r>
                       <a:endParaRPr lang="en-US" sz="1400" dirty="0">
                         <a:latin typeface="Calibri" charset="0"/>
@@ -25390,7 +25390,7 @@
                           <a:ea typeface="Calibri" pitchFamily="34" charset="-122"/>
                           <a:cs typeface="Calibri" pitchFamily="34" charset="-120"/>
                         </a:rPr>
-                        <a:t>1013 автотестов проходят (v0.3.0, evidence.json), независимая проверка на Cedar, реестр утверждений: каждое число воспроизводится командой</a:t>
+                        <a:t>1017 автотестов проходят (v0.3.0, evidence.json), независимая проверка на Cedar, реестр утверждений: каждое число воспроизводится командой</a:t>
                       </a:r>
                       <a:endParaRPr lang="en-US" sz="1300" dirty="0">
                         <a:latin typeface="Calibri" charset="0"/>

--- a/submission/slides/Mandat_VTB.pptx
+++ b/submission/slides/Mandat_VTB.pptx
@@ -134,7 +134,7 @@
   <p:extLst>
     <p:ext uri="{521415D9-36F7-43E2-AB2F-B90AF26B5E84}">
       <p14:sectionLst xmlns:p14="http://schemas.microsoft.com/office/powerpoint/2010/main">
-        <p14:section name="Питч · 5 минут" id="{9d780934-b275-b381-c6c7-c7c5da043ce9}">
+        <p14:section name="Питч · 5 минут" id="{545041aa-0720-7ce6-eae2-9dd706a76731}">
           <p14:sldIdLst>
             <p14:sldId id="256"/>
             <p14:sldId id="257"/>
@@ -152,7 +152,7 @@
             <p14:sldId id="269"/>
           </p14:sldIdLst>
         </p14:section>
-        <p14:section name="Приложение для вопросов жюри" id="{2fdc41bd-a6fc-1370-6260-2713234563aa}">
+        <p14:section name="Приложение для вопросов жюри" id="{498d4031-39dd-a765-5308-a722ac2428bb}">
           <p14:sldIdLst>
             <p14:sldId id="270"/>
             <p14:sldId id="271"/>
@@ -6183,7 +6183,7 @@
                   <a:schemeClr val="accent4"/>
                 </a:solidFill>
               </a:rPr>
-              <a:t>Источники: vtb.ru — «Комплект МЧД и КЭП» в «ВТБ Бизнес», 10.2026; репозиторий «Мандата» v0.3.0: 1017 автотестов, evidence.json от 15.10.2026</a:t>
+              <a:t>Источники: vtb.ru — «Комплект МЧД и КЭП» в «ВТБ Бизнес», 10.2026; репозиторий «Мандата» v0.3.0: 1028 автотестов, evidence.json от 15.10.2026</a:t>
             </a:r>
             <a:endParaRPr lang="en-US" sz="1000" dirty="0"/>
           </a:p>
@@ -7046,7 +7046,7 @@
                   <a:schemeClr val="bg1"/>
                 </a:solidFill>
               </a:rPr>
-              <a:t>1017 автотестов проходят, каждое число воспроизводится командой</a:t>
+              <a:t>1028 автотестов проходят, каждое число воспроизводится командой</a:t>
             </a:r>
             <a:endParaRPr lang="en-US" sz="1500" dirty="0"/>
           </a:p>
@@ -12430,7 +12430,7 @@
                           <a:ea typeface="Calibri" pitchFamily="34" charset="-122"/>
                           <a:cs typeface="Calibri" pitchFamily="34" charset="-120"/>
                         </a:rPr>
-                        <a:t>1017 автотестов; evidence.json</a:t>
+                        <a:t>1028 автотестов; evidence.json</a:t>
                       </a:r>
                       <a:endParaRPr lang="en-US" sz="1400" dirty="0">
                         <a:latin typeface="Calibri" charset="0"/>
@@ -25390,7 +25390,7 @@
                           <a:ea typeface="Calibri" pitchFamily="34" charset="-122"/>
                           <a:cs typeface="Calibri" pitchFamily="34" charset="-120"/>
                         </a:rPr>
-                        <a:t>1017 автотестов проходят (v0.3.0, evidence.json), независимая проверка на Cedar, реестр утверждений: каждое число воспроизводится командой</a:t>
+                        <a:t>1028 автотестов проходят (v0.3.0, evidence.json), независимая проверка на Cedar, реестр утверждений: каждое число воспроизводится командой</a:t>
                       </a:r>
                       <a:endParaRPr lang="en-US" sz="1300" dirty="0">
                         <a:latin typeface="Calibri" charset="0"/>

--- a/submission/slides/Mandat_VTB.pptx
+++ b/submission/slides/Mandat_VTB.pptx
@@ -134,7 +134,7 @@
   <p:extLst>
     <p:ext uri="{521415D9-36F7-43E2-AB2F-B90AF26B5E84}">
       <p14:sectionLst xmlns:p14="http://schemas.microsoft.com/office/powerpoint/2010/main">
-        <p14:section name="Питч · 5 минут" id="{9d780934-b275-b381-c6c7-c7c5da043ce9}">
+        <p14:section name="Питч · 5 минут" id="{6bad9cb6-33b4-c080-6420-df99a9f1cd19}">
           <p14:sldIdLst>
             <p14:sldId id="256"/>
             <p14:sldId id="257"/>
@@ -152,7 +152,7 @@
             <p14:sldId id="269"/>
           </p14:sldIdLst>
         </p14:section>
-        <p14:section name="Приложение для вопросов жюри" id="{2fdc41bd-a6fc-1370-6260-2713234563aa}">
+        <p14:section name="Приложение для вопросов жюри" id="{f4038696-e2b8-d4d1-2579-932cc2e4e61d}">
           <p14:sldIdLst>
             <p14:sldId id="270"/>
             <p14:sldId id="271"/>
@@ -6183,7 +6183,7 @@
                   <a:schemeClr val="accent4"/>
                 </a:solidFill>
               </a:rPr>
-              <a:t>Источники: vtb.ru — «Комплект МЧД и КЭП» в «ВТБ Бизнес», 10.2026; репозиторий «Мандата» v0.3.0: 1017 автотестов, evidence.json от 15.10.2026</a:t>
+              <a:t>Источники: vtb.ru — «Комплект МЧД и КЭП» в «ВТБ Бизнес», 10.2026; репозиторий «Мандата» v0.3.0: 1041 автотест, evidence.json от 15.10.2026</a:t>
             </a:r>
             <a:endParaRPr lang="en-US" sz="1000" dirty="0"/>
           </a:p>
@@ -7046,7 +7046,7 @@
                   <a:schemeClr val="bg1"/>
                 </a:solidFill>
               </a:rPr>
-              <a:t>1017 автотестов проходят, каждое число воспроизводится командой</a:t>
+              <a:t>1041 автотест проходят, каждое число воспроизводится командой</a:t>
             </a:r>
             <a:endParaRPr lang="en-US" sz="1500" dirty="0"/>
           </a:p>
@@ -12430,7 +12430,7 @@
                           <a:ea typeface="Calibri" pitchFamily="34" charset="-122"/>
                           <a:cs typeface="Calibri" pitchFamily="34" charset="-120"/>
                         </a:rPr>
-                        <a:t>1017 автотестов; evidence.json</a:t>
+                        <a:t>1041 автотестов; evidence.json</a:t>
                       </a:r>
                       <a:endParaRPr lang="en-US" sz="1400" dirty="0">
                         <a:latin typeface="Calibri" charset="0"/>
@@ -25390,7 +25390,7 @@
                           <a:ea typeface="Calibri" pitchFamily="34" charset="-122"/>
                           <a:cs typeface="Calibri" pitchFamily="34" charset="-120"/>
                         </a:rPr>
-                        <a:t>1017 автотестов проходят (v0.3.0, evidence.json), независимая проверка на Cedar, реестр утверждений: каждое число воспроизводится командой</a:t>
+                        <a:t>1041 автотест проходят (v0.3.0, evidence.json), независимая проверка на Cedar, реестр утверждений: каждое число воспроизводится командой</a:t>
                       </a:r>
                       <a:endParaRPr lang="en-US" sz="1300" dirty="0">
                         <a:latin typeface="Calibri" charset="0"/>

--- a/submission/slides/Mandat_VTB.pptx
+++ b/submission/slides/Mandat_VTB.pptx
@@ -134,7 +134,7 @@
   <p:extLst>
     <p:ext uri="{521415D9-36F7-43E2-AB2F-B90AF26B5E84}">
       <p14:sectionLst xmlns:p14="http://schemas.microsoft.com/office/powerpoint/2010/main">
-        <p14:section name="Питч · 5 минут" id="{9d780934-b275-b381-c6c7-c7c5da043ce9}">
+        <p14:section name="Питч · 5 минут" id="{f585a702-c565-2666-f758-4276dcef3cf4}">
           <p14:sldIdLst>
             <p14:sldId id="256"/>
             <p14:sldId id="257"/>
@@ -152,7 +152,7 @@
             <p14:sldId id="269"/>
           </p14:sldIdLst>
         </p14:section>
-        <p14:section name="Приложение для вопросов жюри" id="{2fdc41bd-a6fc-1370-6260-2713234563aa}">
+        <p14:section name="Приложение для вопросов жюри" id="{594c04b9-7859-769d-6a4b-888bb57d7350}">
           <p14:sldIdLst>
             <p14:sldId id="270"/>
             <p14:sldId id="271"/>
@@ -6183,7 +6183,7 @@
                   <a:schemeClr val="accent4"/>
                 </a:solidFill>
               </a:rPr>
-              <a:t>Источники: vtb.ru — «Комплект МЧД и КЭП» в «ВТБ Бизнес», 10.2026; репозиторий «Мандата» v0.3.0: 1017 автотестов, evidence.json от 15.10.2026</a:t>
+              <a:t>Источники: vtb.ru — «Комплект МЧД и КЭП» в «ВТБ Бизнес», 10.2026; репозиторий «Мандата» v0.3.0: 1070 автотестов, evidence.json от 15.10.2026</a:t>
             </a:r>
             <a:endParaRPr lang="en-US" sz="1000" dirty="0"/>
           </a:p>
@@ -7046,7 +7046,7 @@
                   <a:schemeClr val="bg1"/>
                 </a:solidFill>
               </a:rPr>
-              <a:t>1017 автотестов проходят, каждое число воспроизводится командой</a:t>
+              <a:t>1070 автотестов проходят, каждое число воспроизводится командой</a:t>
             </a:r>
             <a:endParaRPr lang="en-US" sz="1500" dirty="0"/>
           </a:p>
@@ -12430,7 +12430,7 @@
                           <a:ea typeface="Calibri" pitchFamily="34" charset="-122"/>
                           <a:cs typeface="Calibri" pitchFamily="34" charset="-120"/>
                         </a:rPr>
-                        <a:t>1017 автотестов; evidence.json</a:t>
+                        <a:t>1070 автотестов; evidence.json</a:t>
                       </a:r>
                       <a:endParaRPr lang="en-US" sz="1400" dirty="0">
                         <a:latin typeface="Calibri" charset="0"/>
@@ -25390,7 +25390,7 @@
                           <a:ea typeface="Calibri" pitchFamily="34" charset="-122"/>
                           <a:cs typeface="Calibri" pitchFamily="34" charset="-120"/>
                         </a:rPr>
-                        <a:t>1017 автотестов проходят (v0.3.0, evidence.json), независимая проверка на Cedar, реестр утверждений: каждое число воспроизводится командой</a:t>
+                        <a:t>1070 автотестов проходят (v0.3.0, evidence.json), независимая проверка на Cedar, реестр утверждений: каждое число воспроизводится командой</a:t>
                       </a:r>
                       <a:endParaRPr lang="en-US" sz="1300" dirty="0">
                         <a:latin typeface="Calibri" charset="0"/>

--- a/submission/slides/Mandat_VTB.pptx
+++ b/submission/slides/Mandat_VTB.pptx
@@ -134,7 +134,7 @@
   <p:extLst>
     <p:ext uri="{521415D9-36F7-43E2-AB2F-B90AF26B5E84}">
       <p14:sectionLst xmlns:p14="http://schemas.microsoft.com/office/powerpoint/2010/main">
-        <p14:section name="Питч · 5 минут" id="{6bad9cb6-33b4-c080-6420-df99a9f1cd19}">
+        <p14:section name="Питч · 5 минут" id="{ffd5a99d-0788-4776-1727-360cefe60a97}">
           <p14:sldIdLst>
             <p14:sldId id="256"/>
             <p14:sldId id="257"/>
@@ -152,7 +152,7 @@
             <p14:sldId id="269"/>
           </p14:sldIdLst>
         </p14:section>
-        <p14:section name="Приложение для вопросов жюри" id="{f4038696-e2b8-d4d1-2579-932cc2e4e61d}">
+        <p14:section name="Приложение для вопросов жюри" id="{e2f3cab9-1a54-b22a-856a-3c1d52c72cbe}">
           <p14:sldIdLst>
             <p14:sldId id="270"/>
             <p14:sldId id="271"/>
@@ -6183,7 +6183,7 @@
                   <a:schemeClr val="accent4"/>
                 </a:solidFill>
               </a:rPr>
-              <a:t>Источники: vtb.ru — «Комплект МЧД и КЭП» в «ВТБ Бизнес», 10.2026; репозиторий «Мандата» v0.3.0: 1041 автотест, evidence.json от 15.10.2026</a:t>
+              <a:t>Источники: vtb.ru — «Комплект МЧД и КЭП» в «ВТБ Бизнес», 10.2026; репозиторий «Мандата» v0.3.0: 1046 автотестов, evidence.json от 15.10.2026</a:t>
             </a:r>
             <a:endParaRPr lang="en-US" sz="1000" dirty="0"/>
           </a:p>
@@ -7046,7 +7046,7 @@
                   <a:schemeClr val="bg1"/>
                 </a:solidFill>
               </a:rPr>
-              <a:t>1041 автотест проходят, каждое число воспроизводится командой</a:t>
+              <a:t>1046 автотестов проходят, каждое число воспроизводится командой</a:t>
             </a:r>
             <a:endParaRPr lang="en-US" sz="1500" dirty="0"/>
           </a:p>
@@ -12430,7 +12430,7 @@
                           <a:ea typeface="Calibri" pitchFamily="34" charset="-122"/>
                           <a:cs typeface="Calibri" pitchFamily="34" charset="-120"/>
                         </a:rPr>
-                        <a:t>1041 автотестов; evidence.json</a:t>
+                        <a:t>1046 автотестов; evidence.json</a:t>
                       </a:r>
                       <a:endParaRPr lang="en-US" sz="1400" dirty="0">
                         <a:latin typeface="Calibri" charset="0"/>
@@ -25390,7 +25390,7 @@
                           <a:ea typeface="Calibri" pitchFamily="34" charset="-122"/>
                           <a:cs typeface="Calibri" pitchFamily="34" charset="-120"/>
                         </a:rPr>
-                        <a:t>1041 автотест проходят (v0.3.0, evidence.json), независимая проверка на Cedar, реестр утверждений: каждое число воспроизводится командой</a:t>
+                        <a:t>1046 автотестов проходят (v0.3.0, evidence.json), независимая проверка на Cedar, реестр утверждений: каждое число воспроизводится командой</a:t>
                       </a:r>
                       <a:endParaRPr lang="en-US" sz="1300" dirty="0">
                         <a:latin typeface="Calibri" charset="0"/>

--- a/submission/slides/Mandat_VTB.pptx
+++ b/submission/slides/Mandat_VTB.pptx
@@ -134,7 +134,7 @@
   <p:extLst>
     <p:ext uri="{521415D9-36F7-43E2-AB2F-B90AF26B5E84}">
       <p14:sectionLst xmlns:p14="http://schemas.microsoft.com/office/powerpoint/2010/main">
-        <p14:section name="Питч · 5 минут" id="{9d780934-b275-b381-c6c7-c7c5da043ce9}">
+        <p14:section name="Питч · 5 минут" id="{ffd5a99d-0788-4776-1727-360cefe60a97}">
           <p14:sldIdLst>
             <p14:sldId id="256"/>
             <p14:sldId id="257"/>
@@ -152,7 +152,7 @@
             <p14:sldId id="269"/>
           </p14:sldIdLst>
         </p14:section>
-        <p14:section name="Приложение для вопросов жюри" id="{2fdc41bd-a6fc-1370-6260-2713234563aa}">
+        <p14:section name="Приложение для вопросов жюри" id="{e2f3cab9-1a54-b22a-856a-3c1d52c72cbe}">
           <p14:sldIdLst>
             <p14:sldId id="270"/>
             <p14:sldId id="271"/>
@@ -6183,7 +6183,7 @@
                   <a:schemeClr val="accent4"/>
                 </a:solidFill>
               </a:rPr>
-              <a:t>Источники: vtb.ru — «Комплект МЧД и КЭП» в «ВТБ Бизнес», 10.2026; репозиторий «Мандата» v0.3.0: 1017 автотестов, evidence.json от 15.10.2026</a:t>
+              <a:t>Источники: vtb.ru — «Комплект МЧД и КЭП» в «ВТБ Бизнес», 10.2026; репозиторий «Мандата» v0.3.0: 1046 автотестов, evidence.json от 15.10.2026</a:t>
             </a:r>
             <a:endParaRPr lang="en-US" sz="1000" dirty="0"/>
           </a:p>
@@ -7046,7 +7046,7 @@
                   <a:schemeClr val="bg1"/>
                 </a:solidFill>
               </a:rPr>
-              <a:t>1017 автотестов проходят, каждое число воспроизводится командой</a:t>
+              <a:t>1046 автотестов проходят, каждое число воспроизводится командой</a:t>
             </a:r>
             <a:endParaRPr lang="en-US" sz="1500" dirty="0"/>
           </a:p>
@@ -12430,7 +12430,7 @@
                           <a:ea typeface="Calibri" pitchFamily="34" charset="-122"/>
                           <a:cs typeface="Calibri" pitchFamily="34" charset="-120"/>
                         </a:rPr>
-                        <a:t>1017 автотестов; evidence.json</a:t>
+                        <a:t>1046 автотестов; evidence.json</a:t>
                       </a:r>
                       <a:endParaRPr lang="en-US" sz="1400" dirty="0">
                         <a:latin typeface="Calibri" charset="0"/>
@@ -25390,7 +25390,7 @@
                           <a:ea typeface="Calibri" pitchFamily="34" charset="-122"/>
                           <a:cs typeface="Calibri" pitchFamily="34" charset="-120"/>
                         </a:rPr>
-                        <a:t>1017 автотестов проходят (v0.3.0, evidence.json), независимая проверка на Cedar, реестр утверждений: каждое число воспроизводится командой</a:t>
+                        <a:t>1046 автотестов проходят (v0.3.0, evidence.json), независимая проверка на Cedar, реестр утверждений: каждое число воспроизводится командой</a:t>
                       </a:r>
                       <a:endParaRPr lang="en-US" sz="1300" dirty="0">
                         <a:latin typeface="Calibri" charset="0"/>

--- a/submission/slides/Mandat_VTB.pptx
+++ b/submission/slides/Mandat_VTB.pptx
@@ -134,7 +134,7 @@
   <p:extLst>
     <p:ext uri="{521415D9-36F7-43E2-AB2F-B90AF26B5E84}">
       <p14:sectionLst xmlns:p14="http://schemas.microsoft.com/office/powerpoint/2010/main">
-        <p14:section name="Питч · 5 минут" id="{f585a702-c565-2666-f758-4276dcef3cf4}">
+        <p14:section name="Питч · 5 минут" id="{02fe680b-f766-bdea-d2e2-156163dec357}">
           <p14:sldIdLst>
             <p14:sldId id="256"/>
             <p14:sldId id="257"/>
@@ -152,7 +152,7 @@
             <p14:sldId id="269"/>
           </p14:sldIdLst>
         </p14:section>
-        <p14:section name="Приложение для вопросов жюри" id="{594c04b9-7859-769d-6a4b-888bb57d7350}">
+        <p14:section name="Приложение для вопросов жюри" id="{f2683107-17d1-7a35-9d04-002fb970f2fa}">
           <p14:sldIdLst>
             <p14:sldId id="270"/>
             <p14:sldId id="271"/>

--- a/submission/slides/Mandat_VTB.pptx
+++ b/submission/slides/Mandat_VTB.pptx
@@ -134,7 +134,7 @@
   <p:extLst>
     <p:ext uri="{521415D9-36F7-43E2-AB2F-B90AF26B5E84}">
       <p14:sectionLst xmlns:p14="http://schemas.microsoft.com/office/powerpoint/2010/main">
-        <p14:section name="Питч · 5 минут" id="{ffd5a99d-0788-4776-1727-360cefe60a97}">
+        <p14:section name="Питч · 5 минут" id="{5fe5125d-4a45-e0f0-7d3f-8be70f8fc870}">
           <p14:sldIdLst>
             <p14:sldId id="256"/>
             <p14:sldId id="257"/>
@@ -152,7 +152,7 @@
             <p14:sldId id="269"/>
           </p14:sldIdLst>
         </p14:section>
-        <p14:section name="Приложение для вопросов жюри" id="{e2f3cab9-1a54-b22a-856a-3c1d52c72cbe}">
+        <p14:section name="Приложение для вопросов жюри" id="{6e7c9e75-98d4-6245-fa7b-35b90c9bc87e}">
           <p14:sldIdLst>
             <p14:sldId id="270"/>
             <p14:sldId id="271"/>
@@ -6183,7 +6183,7 @@
                   <a:schemeClr val="accent4"/>
                 </a:solidFill>
               </a:rPr>
-              <a:t>Источники: vtb.ru — «Комплект МЧД и КЭП» в «ВТБ Бизнес», 10.2026; репозиторий «Мандата» v0.3.0: 1046 автотестов, evidence.json от 15.10.2026</a:t>
+              <a:t>Источники: vtb.ru — «Комплект МЧД и КЭП» в «ВТБ Бизнес», 10.2026; репозиторий «Мандата» v0.3.0: 1091 автотест, evidence.json от 15.10.2026</a:t>
             </a:r>
             <a:endParaRPr lang="en-US" sz="1000" dirty="0"/>
           </a:p>
@@ -7046,7 +7046,7 @@
                   <a:schemeClr val="bg1"/>
                 </a:solidFill>
               </a:rPr>
-              <a:t>1046 автотестов проходят, каждое число воспроизводится командой</a:t>
+              <a:t>1091 автотест проходят, каждое число воспроизводится командой</a:t>
             </a:r>
             <a:endParaRPr lang="en-US" sz="1500" dirty="0"/>
           </a:p>
@@ -12430,7 +12430,7 @@
                           <a:ea typeface="Calibri" pitchFamily="34" charset="-122"/>
                           <a:cs typeface="Calibri" pitchFamily="34" charset="-120"/>
                         </a:rPr>
-                        <a:t>1046 автотестов; evidence.json</a:t>
+                        <a:t>1091 автотестов; evidence.json</a:t>
                       </a:r>
                       <a:endParaRPr lang="en-US" sz="1400" dirty="0">
                         <a:latin typeface="Calibri" charset="0"/>
@@ -25390,7 +25390,7 @@
                           <a:ea typeface="Calibri" pitchFamily="34" charset="-122"/>
                           <a:cs typeface="Calibri" pitchFamily="34" charset="-120"/>
                         </a:rPr>
-                        <a:t>1046 автотестов проходят (v0.3.0, evidence.json), независимая проверка на Cedar, реестр утверждений: каждое число воспроизводится командой</a:t>
+                        <a:t>1091 автотест проходят (v0.3.0, evidence.json), независимая проверка на Cedar, реестр утверждений: каждое число воспроизводится командой</a:t>
                       </a:r>
                       <a:endParaRPr lang="en-US" sz="1300" dirty="0">
                         <a:latin typeface="Calibri" charset="0"/>

--- a/submission/slides/Mandat_VTB.pptx
+++ b/submission/slides/Mandat_VTB.pptx
@@ -134,7 +134,7 @@
   <p:extLst>
     <p:ext uri="{521415D9-36F7-43E2-AB2F-B90AF26B5E84}">
       <p14:sectionLst xmlns:p14="http://schemas.microsoft.com/office/powerpoint/2010/main">
-        <p14:section name="Питч · 5 минут" id="{5fe5125d-4a45-e0f0-7d3f-8be70f8fc870}">
+        <p14:section name="Питч · 5 минут" id="{a7ef49d5-3875-3727-22b9-4387151783b8}">
           <p14:sldIdLst>
             <p14:sldId id="256"/>
             <p14:sldId id="257"/>
@@ -152,7 +152,7 @@
             <p14:sldId id="269"/>
           </p14:sldIdLst>
         </p14:section>
-        <p14:section name="Приложение для вопросов жюри" id="{6e7c9e75-98d4-6245-fa7b-35b90c9bc87e}">
+        <p14:section name="Приложение для вопросов жюри" id="{06907f38-e4ba-44b6-1f5a-c25425ad99e2}">
           <p14:sldIdLst>
             <p14:sldId id="270"/>
             <p14:sldId id="271"/>
@@ -6183,7 +6183,7 @@
                   <a:schemeClr val="accent4"/>
                 </a:solidFill>
               </a:rPr>
-              <a:t>Источники: vtb.ru — «Комплект МЧД и КЭП» в «ВТБ Бизнес», 10.2026; репозиторий «Мандата» v0.3.0: 1091 автотест, evidence.json от 15.10.2026</a:t>
+              <a:t>Источники: vtb.ru — «Комплект МЧД и КЭП» в «ВТБ Бизнес», 10.2026; репозиторий «Мандата» v0.3.0: 1144 автотеста, evidence.json от 15.10.2026</a:t>
             </a:r>
             <a:endParaRPr lang="en-US" sz="1000" dirty="0"/>
           </a:p>
@@ -7046,7 +7046,7 @@
                   <a:schemeClr val="bg1"/>
                 </a:solidFill>
               </a:rPr>
-              <a:t>1091 автотест проходят, каждое число воспроизводится командой</a:t>
+              <a:t>1144 автотеста проходят, каждое число воспроизводится командой</a:t>
             </a:r>
             <a:endParaRPr lang="en-US" sz="1500" dirty="0"/>
           </a:p>
@@ -12430,7 +12430,7 @@
                           <a:ea typeface="Calibri" pitchFamily="34" charset="-122"/>
                           <a:cs typeface="Calibri" pitchFamily="34" charset="-120"/>
                         </a:rPr>
-                        <a:t>1091 автотестов; evidence.json</a:t>
+                        <a:t>1144 автотестов; evidence.json</a:t>
                       </a:r>
                       <a:endParaRPr lang="en-US" sz="1400" dirty="0">
                         <a:latin typeface="Calibri" charset="0"/>
@@ -25390,7 +25390,7 @@
                           <a:ea typeface="Calibri" pitchFamily="34" charset="-122"/>
                           <a:cs typeface="Calibri" pitchFamily="34" charset="-120"/>
                         </a:rPr>
-                        <a:t>1091 автотест проходят (v0.3.0, evidence.json), независимая проверка на Cedar, реестр утверждений: каждое число воспроизводится командой</a:t>
+                        <a:t>1144 автотеста проходят (v0.3.0, evidence.json), независимая проверка на Cedar, реестр утверждений: каждое число воспроизводится командой</a:t>
                       </a:r>
                       <a:endParaRPr lang="en-US" sz="1300" dirty="0">
                         <a:latin typeface="Calibri" charset="0"/>

--- a/submission/slides/Mandat_VTB.pptx
+++ b/submission/slides/Mandat_VTB.pptx
@@ -134,7 +134,7 @@
   <p:extLst>
     <p:ext uri="{521415D9-36F7-43E2-AB2F-B90AF26B5E84}">
       <p14:sectionLst xmlns:p14="http://schemas.microsoft.com/office/powerpoint/2010/main">
-        <p14:section name="Питч · 5 минут" id="{a7ef49d5-3875-3727-22b9-4387151783b8}">
+        <p14:section name="Питч · 5 минут" id="{098ca3ff-248d-e2b7-ef77-b8108a82c598}">
           <p14:sldIdLst>
             <p14:sldId id="256"/>
             <p14:sldId id="257"/>
@@ -152,7 +152,7 @@
             <p14:sldId id="269"/>
           </p14:sldIdLst>
         </p14:section>
-        <p14:section name="Приложение для вопросов жюри" id="{06907f38-e4ba-44b6-1f5a-c25425ad99e2}">
+        <p14:section name="Приложение для вопросов жюри" id="{21a4a41a-9323-ea34-e52c-574b792b1aca}">
           <p14:sldIdLst>
             <p14:sldId id="270"/>
             <p14:sldId id="271"/>
@@ -6183,7 +6183,7 @@
                   <a:schemeClr val="accent4"/>
                 </a:solidFill>
               </a:rPr>
-              <a:t>Источники: vtb.ru — «Комплект МЧД и КЭП» в «ВТБ Бизнес», 10.2026; репозиторий «Мандата» v0.3.0: 1144 автотеста, evidence.json от 15.10.2026</a:t>
+              <a:t>Источники: vtb.ru — «Комплект МЧД и КЭП» в «ВТБ Бизнес», 10.2026; репозиторий «Мандата» v0.3.0: 1161 автотест, evidence.json от 15.10.2026</a:t>
             </a:r>
             <a:endParaRPr lang="en-US" sz="1000" dirty="0"/>
           </a:p>
@@ -7046,7 +7046,7 @@
                   <a:schemeClr val="bg1"/>
                 </a:solidFill>
               </a:rPr>
-              <a:t>1144 автотеста проходят, каждое число воспроизводится командой</a:t>
+              <a:t>1161 автотест проходят, каждое число воспроизводится командой</a:t>
             </a:r>
             <a:endParaRPr lang="en-US" sz="1500" dirty="0"/>
           </a:p>
@@ -12430,7 +12430,7 @@
                           <a:ea typeface="Calibri" pitchFamily="34" charset="-122"/>
                           <a:cs typeface="Calibri" pitchFamily="34" charset="-120"/>
                         </a:rPr>
-                        <a:t>1144 автотестов; evidence.json</a:t>
+                        <a:t>1161 автотестов; evidence.json</a:t>
                       </a:r>
                       <a:endParaRPr lang="en-US" sz="1400" dirty="0">
                         <a:latin typeface="Calibri" charset="0"/>
@@ -25390,7 +25390,7 @@
                           <a:ea typeface="Calibri" pitchFamily="34" charset="-122"/>
                           <a:cs typeface="Calibri" pitchFamily="34" charset="-120"/>
                         </a:rPr>
-                        <a:t>1144 автотеста проходят (v0.3.0, evidence.json), независимая проверка на Cedar, реестр утверждений: каждое число воспроизводится командой</a:t>
+                        <a:t>1161 автотест проходят (v0.3.0, evidence.json), независимая проверка на Cedar, реестр утверждений: каждое число воспроизводится командой</a:t>
                       </a:r>
                       <a:endParaRPr lang="en-US" sz="1300" dirty="0">
                         <a:latin typeface="Calibri" charset="0"/>

--- a/submission/slides/Mandat_VTB.pptx
+++ b/submission/slides/Mandat_VTB.pptx
@@ -134,7 +134,7 @@
   <p:extLst>
     <p:ext uri="{521415D9-36F7-43E2-AB2F-B90AF26B5E84}">
       <p14:sectionLst xmlns:p14="http://schemas.microsoft.com/office/powerpoint/2010/main">
-        <p14:section name="Питч · 5 минут" id="{a7ef49d5-3875-3727-22b9-4387151783b8}">
+        <p14:section name="Питч · 5 минут" id="{bb995f38-90ec-33dc-463c-26761da12218}">
           <p14:sldIdLst>
             <p14:sldId id="256"/>
             <p14:sldId id="257"/>
@@ -152,7 +152,7 @@
             <p14:sldId id="269"/>
           </p14:sldIdLst>
         </p14:section>
-        <p14:section name="Приложение для вопросов жюри" id="{06907f38-e4ba-44b6-1f5a-c25425ad99e2}">
+        <p14:section name="Приложение для вопросов жюри" id="{afb5a857-fb11-677c-28c4-d3975fd3c326}">
           <p14:sldIdLst>
             <p14:sldId id="270"/>
             <p14:sldId id="271"/>
@@ -6183,7 +6183,7 @@
                   <a:schemeClr val="accent4"/>
                 </a:solidFill>
               </a:rPr>
-              <a:t>Источники: vtb.ru — «Комплект МЧД и КЭП» в «ВТБ Бизнес», 10.2026; репозиторий «Мандата» v0.3.0: 1144 автотеста, evidence.json от 15.10.2026</a:t>
+              <a:t>Источники: vtb.ru — «Комплект МЧД и КЭП» в «ВТБ Бизнес», 10.2026; репозиторий «Мандата» v0.3.0: 1155 автотестов, evidence.json от 15.10.2026</a:t>
             </a:r>
             <a:endParaRPr lang="en-US" sz="1000" dirty="0"/>
           </a:p>
@@ -7046,7 +7046,7 @@
                   <a:schemeClr val="bg1"/>
                 </a:solidFill>
               </a:rPr>
-              <a:t>1144 автотеста проходят, каждое число воспроизводится командой</a:t>
+              <a:t>1155 автотестов проходят, каждое число воспроизводится командой</a:t>
             </a:r>
             <a:endParaRPr lang="en-US" sz="1500" dirty="0"/>
           </a:p>
@@ -12430,7 +12430,7 @@
                           <a:ea typeface="Calibri" pitchFamily="34" charset="-122"/>
                           <a:cs typeface="Calibri" pitchFamily="34" charset="-120"/>
                         </a:rPr>
-                        <a:t>1144 автотестов; evidence.json</a:t>
+                        <a:t>1155 автотестов; evidence.json</a:t>
                       </a:r>
                       <a:endParaRPr lang="en-US" sz="1400" dirty="0">
                         <a:latin typeface="Calibri" charset="0"/>
@@ -25390,7 +25390,7 @@
                           <a:ea typeface="Calibri" pitchFamily="34" charset="-122"/>
                           <a:cs typeface="Calibri" pitchFamily="34" charset="-120"/>
                         </a:rPr>
-                        <a:t>1144 автотеста проходят (v0.3.0, evidence.json), независимая проверка на Cedar, реестр утверждений: каждое число воспроизводится командой</a:t>
+                        <a:t>1155 автотестов проходят (v0.3.0, evidence.json), независимая проверка на Cedar, реестр утверждений: каждое число воспроизводится командой</a:t>
                       </a:r>
                       <a:endParaRPr lang="en-US" sz="1300" dirty="0">
                         <a:latin typeface="Calibri" charset="0"/>

--- a/submission/slides/Mandat_VTB.pptx
+++ b/submission/slides/Mandat_VTB.pptx
@@ -134,7 +134,7 @@
   <p:extLst>
     <p:ext uri="{521415D9-36F7-43E2-AB2F-B90AF26B5E84}">
       <p14:sectionLst xmlns:p14="http://schemas.microsoft.com/office/powerpoint/2010/main">
-        <p14:section name="Питч · 5 минут" id="{bb995f38-90ec-33dc-463c-26761da12218}">
+        <p14:section name="Питч · 5 минут" id="{5df47ccf-d680-d64b-2384-d8205528fd66}">
           <p14:sldIdLst>
             <p14:sldId id="256"/>
             <p14:sldId id="257"/>
@@ -152,7 +152,7 @@
             <p14:sldId id="269"/>
           </p14:sldIdLst>
         </p14:section>
-        <p14:section name="Приложение для вопросов жюри" id="{afb5a857-fb11-677c-28c4-d3975fd3c326}">
+        <p14:section name="Приложение для вопросов жюри" id="{3396805c-37e2-2af3-4b83-e5f6e245235e}">
           <p14:sldIdLst>
             <p14:sldId id="270"/>
             <p14:sldId id="271"/>
@@ -6183,7 +6183,7 @@
                   <a:schemeClr val="accent4"/>
                 </a:solidFill>
               </a:rPr>
-              <a:t>Источники: vtb.ru — «Комплект МЧД и КЭП» в «ВТБ Бизнес», 10.2026; репозиторий «Мандата» v0.3.0: 1155 автотестов, evidence.json от 15.10.2026</a:t>
+              <a:t>Источники: vtb.ru — «Комплект МЧД и КЭП» в «ВТБ Бизнес», 10.2026; репозиторий «Мандата» v0.3.0: 1172 автотеста, evidence.json от 15.10.2026</a:t>
             </a:r>
             <a:endParaRPr lang="en-US" sz="1000" dirty="0"/>
           </a:p>
@@ -7046,7 +7046,7 @@
                   <a:schemeClr val="bg1"/>
                 </a:solidFill>
               </a:rPr>
-              <a:t>1155 автотестов проходят, каждое число воспроизводится командой</a:t>
+              <a:t>1172 автотеста проходят, каждое число воспроизводится командой</a:t>
             </a:r>
             <a:endParaRPr lang="en-US" sz="1500" dirty="0"/>
           </a:p>
@@ -12430,7 +12430,7 @@
                           <a:ea typeface="Calibri" pitchFamily="34" charset="-122"/>
                           <a:cs typeface="Calibri" pitchFamily="34" charset="-120"/>
                         </a:rPr>
-                        <a:t>1155 автотестов; evidence.json</a:t>
+                        <a:t>1172 автотестов; evidence.json</a:t>
                       </a:r>
                       <a:endParaRPr lang="en-US" sz="1400" dirty="0">
                         <a:latin typeface="Calibri" charset="0"/>
@@ -25390,7 +25390,7 @@
                           <a:ea typeface="Calibri" pitchFamily="34" charset="-122"/>
                           <a:cs typeface="Calibri" pitchFamily="34" charset="-120"/>
                         </a:rPr>
-                        <a:t>1155 автотестов проходят (v0.3.0, evidence.json), независимая проверка на Cedar, реестр утверждений: каждое число воспроизводится командой</a:t>
+                        <a:t>1172 автотеста проходят (v0.3.0, evidence.json), независимая проверка на Cedar, реестр утверждений: каждое число воспроизводится командой</a:t>
                       </a:r>
                       <a:endParaRPr lang="en-US" sz="1300" dirty="0">
                         <a:latin typeface="Calibri" charset="0"/>

--- a/submission/slides/Mandat_VTB.pptx
+++ b/submission/slides/Mandat_VTB.pptx
@@ -134,7 +134,7 @@
   <p:extLst>
     <p:ext uri="{521415D9-36F7-43E2-AB2F-B90AF26B5E84}">
       <p14:sectionLst xmlns:p14="http://schemas.microsoft.com/office/powerpoint/2010/main">
-        <p14:section name="Питч · 5 минут" id="{5df47ccf-d680-d64b-2384-d8205528fd66}">
+        <p14:section name="Питч · 5 минут" id="{4d49ef39-379d-207e-65b5-a97f6dd66565}">
           <p14:sldIdLst>
             <p14:sldId id="256"/>
             <p14:sldId id="257"/>
@@ -152,7 +152,7 @@
             <p14:sldId id="269"/>
           </p14:sldIdLst>
         </p14:section>
-        <p14:section name="Приложение для вопросов жюри" id="{3396805c-37e2-2af3-4b83-e5f6e245235e}">
+        <p14:section name="Приложение для вопросов жюри" id="{1c60aae3-3a1b-11a7-dfc1-7f27ab5759ce}">
           <p14:sldIdLst>
             <p14:sldId id="270"/>
             <p14:sldId id="271"/>
@@ -6183,7 +6183,7 @@
                   <a:schemeClr val="accent4"/>
                 </a:solidFill>
               </a:rPr>
-              <a:t>Источники: vtb.ru — «Комплект МЧД и КЭП» в «ВТБ Бизнес», 10.2026; репозиторий «Мандата» v0.3.0: 1172 автотеста, evidence.json от 15.10.2026</a:t>
+              <a:t>Источники: vtb.ru — «Комплект МЧД и КЭП» в «ВТБ Бизнес», 10.2026; репозиторий «Мандата» v0.3.0: 1200 автотестов, evidence.json от 16.10.2026</a:t>
             </a:r>
             <a:endParaRPr lang="en-US" sz="1000" dirty="0"/>
           </a:p>
@@ -7046,7 +7046,7 @@
                   <a:schemeClr val="bg1"/>
                 </a:solidFill>
               </a:rPr>
-              <a:t>1172 автотеста проходят, каждое число воспроизводится командой</a:t>
+              <a:t>1200 автотестов проходят, каждое число воспроизводится командой</a:t>
             </a:r>
             <a:endParaRPr lang="en-US" sz="1500" dirty="0"/>
           </a:p>
@@ -12430,7 +12430,7 @@
                           <a:ea typeface="Calibri" pitchFamily="34" charset="-122"/>
                           <a:cs typeface="Calibri" pitchFamily="34" charset="-120"/>
                         </a:rPr>
-                        <a:t>1172 автотестов; evidence.json</a:t>
+                        <a:t>1200 автотестов; evidence.json</a:t>
                       </a:r>
                       <a:endParaRPr lang="en-US" sz="1400" dirty="0">
                         <a:latin typeface="Calibri" charset="0"/>
@@ -25390,7 +25390,7 @@
                           <a:ea typeface="Calibri" pitchFamily="34" charset="-122"/>
                           <a:cs typeface="Calibri" pitchFamily="34" charset="-120"/>
                         </a:rPr>
-                        <a:t>1172 автотеста проходят (v0.3.0, evidence.json), независимая проверка на Cedar, реестр утверждений: каждое число воспроизводится командой</a:t>
+                        <a:t>1200 автотестов проходят (v0.3.0, evidence.json), независимая проверка на Cedar, реестр утверждений: каждое число воспроизводится командой</a:t>
                       </a:r>
                       <a:endParaRPr lang="en-US" sz="1300" dirty="0">
                         <a:latin typeface="Calibri" charset="0"/>
@@ -33386,7 +33386,7 @@
                   <a:schemeClr val="accent4"/>
                 </a:solidFill>
               </a:rPr>
-              <a:t>Воспроизводится: mandat eval --per-defect 6; python -m pytest tests/test_properties.py tests/test_cedar.py; python scripts/bench.py → evidence.json (15.10.2026, v0.3.0)</a:t>
+              <a:t>Воспроизводится: mandat eval --per-defect 6; python -m pytest tests/test_properties.py tests/test_cedar.py; python scripts/bench.py → evidence.json (16.10.2026, v0.3.0)</a:t>
             </a:r>
             <a:endParaRPr lang="en-US" sz="1000" dirty="0"/>
           </a:p>

--- a/submission/slides/Mandat_VTB.pptx
+++ b/submission/slides/Mandat_VTB.pptx
@@ -134,7 +134,7 @@
   <p:extLst>
     <p:ext uri="{521415D9-36F7-43E2-AB2F-B90AF26B5E84}">
       <p14:sectionLst xmlns:p14="http://schemas.microsoft.com/office/powerpoint/2010/main">
-        <p14:section name="Питч · 5 минут" id="{4d49ef39-379d-207e-65b5-a97f6dd66565}">
+        <p14:section name="Питч · 5 минут" id="{c698e1eb-7d10-9b6f-275a-bd41a8b3bb13}">
           <p14:sldIdLst>
             <p14:sldId id="256"/>
             <p14:sldId id="257"/>
@@ -152,7 +152,7 @@
             <p14:sldId id="269"/>
           </p14:sldIdLst>
         </p14:section>
-        <p14:section name="Приложение для вопросов жюри" id="{1c60aae3-3a1b-11a7-dfc1-7f27ab5759ce}">
+        <p14:section name="Приложение для вопросов жюри" id="{68eeefdd-8e4b-741a-0aa6-3c206428b117}">
           <p14:sldIdLst>
             <p14:sldId id="270"/>
             <p14:sldId id="271"/>
@@ -6183,7 +6183,7 @@
                   <a:schemeClr val="accent4"/>
                 </a:solidFill>
               </a:rPr>
-              <a:t>Источники: vtb.ru — «Комплект МЧД и КЭП» в «ВТБ Бизнес», 10.2026; репозиторий «Мандата» v0.3.0: 1200 автотестов, evidence.json от 16.10.2026</a:t>
+              <a:t>Источники: vtb.ru — «Комплект МЧД и КЭП» в «ВТБ Бизнес», 10.2026; репозиторий «Мандата» v0.3.0: 1222 автотеста, evidence.json от 16.10.2026</a:t>
             </a:r>
             <a:endParaRPr lang="en-US" sz="1000" dirty="0"/>
           </a:p>
@@ -7046,7 +7046,7 @@
                   <a:schemeClr val="bg1"/>
                 </a:solidFill>
               </a:rPr>
-              <a:t>1200 автотестов проходят, каждое число воспроизводится командой</a:t>
+              <a:t>1222 автотеста проходят, каждое число воспроизводится командой</a:t>
             </a:r>
             <a:endParaRPr lang="en-US" sz="1500" dirty="0"/>
           </a:p>
@@ -12430,7 +12430,7 @@
                           <a:ea typeface="Calibri" pitchFamily="34" charset="-122"/>
                           <a:cs typeface="Calibri" pitchFamily="34" charset="-120"/>
                         </a:rPr>
-                        <a:t>1200 автотестов; evidence.json</a:t>
+                        <a:t>1222 автотестов; evidence.json</a:t>
                       </a:r>
                       <a:endParaRPr lang="en-US" sz="1400" dirty="0">
                         <a:latin typeface="Calibri" charset="0"/>
@@ -25390,7 +25390,7 @@
                           <a:ea typeface="Calibri" pitchFamily="34" charset="-122"/>
                           <a:cs typeface="Calibri" pitchFamily="34" charset="-120"/>
                         </a:rPr>
-                        <a:t>1200 автотестов проходят (v0.3.0, evidence.json), независимая проверка на Cedar, реестр утверждений: каждое число воспроизводится командой</a:t>
+                        <a:t>1222 автотеста проходят (v0.3.0, evidence.json), независимая проверка на Cedar, реестр утверждений: каждое число воспроизводится командой</a:t>
                       </a:r>
                       <a:endParaRPr lang="en-US" sz="1300" dirty="0">
                         <a:latin typeface="Calibri" charset="0"/>

--- a/submission/slides/Mandat_VTB.pptx
+++ b/submission/slides/Mandat_VTB.pptx
@@ -134,7 +134,7 @@
   <p:extLst>
     <p:ext uri="{521415D9-36F7-43E2-AB2F-B90AF26B5E84}">
       <p14:sectionLst xmlns:p14="http://schemas.microsoft.com/office/powerpoint/2010/main">
-        <p14:section name="Питч · 5 минут" id="{c698e1eb-7d10-9b6f-275a-bd41a8b3bb13}">
+        <p14:section name="Питч · 5 минут" id="{622c27a8-95a2-0db7-65aa-e810fff81505}">
           <p14:sldIdLst>
             <p14:sldId id="256"/>
             <p14:sldId id="257"/>
@@ -152,7 +152,7 @@
             <p14:sldId id="269"/>
           </p14:sldIdLst>
         </p14:section>
-        <p14:section name="Приложение для вопросов жюри" id="{68eeefdd-8e4b-741a-0aa6-3c206428b117}">
+        <p14:section name="Приложение для вопросов жюри" id="{965baedc-fa4e-333e-4bcb-8b7541b7b7df}">
           <p14:sldIdLst>
             <p14:sldId id="270"/>
             <p14:sldId id="271"/>
@@ -6183,7 +6183,7 @@
                   <a:schemeClr val="accent4"/>
                 </a:solidFill>
               </a:rPr>
-              <a:t>Источники: vtb.ru — «Комплект МЧД и КЭП» в «ВТБ Бизнес», 10.2026; репозиторий «Мандата» v0.3.0: 1222 автотеста, evidence.json от 16.10.2026</a:t>
+              <a:t>Источники: vtb.ru — «Комплект МЧД и КЭП» в «ВТБ Бизнес», 10.2026; репозиторий «Мандата» v0.3.0: 1223 автотеста, evidence.json от 16.10.2026</a:t>
             </a:r>
             <a:endParaRPr lang="en-US" sz="1000" dirty="0"/>
           </a:p>
@@ -7046,7 +7046,7 @@
                   <a:schemeClr val="bg1"/>
                 </a:solidFill>
               </a:rPr>
-              <a:t>1222 автотеста проходят, каждое число воспроизводится командой</a:t>
+              <a:t>1223 автотеста проходят, каждое число воспроизводится командой</a:t>
             </a:r>
             <a:endParaRPr lang="en-US" sz="1500" dirty="0"/>
           </a:p>
@@ -12430,7 +12430,7 @@
                           <a:ea typeface="Calibri" pitchFamily="34" charset="-122"/>
                           <a:cs typeface="Calibri" pitchFamily="34" charset="-120"/>
                         </a:rPr>
-                        <a:t>1222 автотестов; evidence.json</a:t>
+                        <a:t>1223 автотестов; evidence.json</a:t>
                       </a:r>
                       <a:endParaRPr lang="en-US" sz="1400" dirty="0">
                         <a:latin typeface="Calibri" charset="0"/>
@@ -25390,7 +25390,7 @@
                           <a:ea typeface="Calibri" pitchFamily="34" charset="-122"/>
                           <a:cs typeface="Calibri" pitchFamily="34" charset="-120"/>
                         </a:rPr>
-                        <a:t>1222 автотеста проходят (v0.3.0, evidence.json), независимая проверка на Cedar, реестр утверждений: каждое число воспроизводится командой</a:t>
+                        <a:t>1223 автотеста проходят (v0.3.0, evidence.json), независимая проверка на Cedar, реестр утверждений: каждое число воспроизводится командой</a:t>
                       </a:r>
                       <a:endParaRPr lang="en-US" sz="1300" dirty="0">
                         <a:latin typeface="Calibri" charset="0"/>

--- a/submission/slides/Mandat_VTB.pptx
+++ b/submission/slides/Mandat_VTB.pptx
@@ -134,7 +134,7 @@
   <p:extLst>
     <p:ext uri="{521415D9-36F7-43E2-AB2F-B90AF26B5E84}">
       <p14:sectionLst xmlns:p14="http://schemas.microsoft.com/office/powerpoint/2010/main">
-        <p14:section name="Питч · 5 минут" id="{c698e1eb-7d10-9b6f-275a-bd41a8b3bb13}">
+        <p14:section name="Питч · 5 минут" id="{933b954e-ddb8-2f06-01da-2255d5dd50b6}">
           <p14:sldIdLst>
             <p14:sldId id="256"/>
             <p14:sldId id="257"/>
@@ -152,7 +152,7 @@
             <p14:sldId id="269"/>
           </p14:sldIdLst>
         </p14:section>
-        <p14:section name="Приложение для вопросов жюри" id="{68eeefdd-8e4b-741a-0aa6-3c206428b117}">
+        <p14:section name="Приложение для вопросов жюри" id="{b72bf813-f76e-a0c6-e4ed-4bc79e6d3a9c}">
           <p14:sldIdLst>
             <p14:sldId id="270"/>
             <p14:sldId id="271"/>
@@ -6183,7 +6183,7 @@
                   <a:schemeClr val="accent4"/>
                 </a:solidFill>
               </a:rPr>
-              <a:t>Источники: vtb.ru — «Комплект МЧД и КЭП» в «ВТБ Бизнес», 10.2026; репозиторий «Мандата» v0.3.0: 1222 автотеста, evidence.json от 16.10.2026</a:t>
+              <a:t>Источники: vtb.ru — «Комплект МЧД и КЭП» в «ВТБ Бизнес», 10.2026; репозиторий «Мандата» v0.3.0: 1253 автотеста, evidence.json от 16.10.2026</a:t>
             </a:r>
             <a:endParaRPr lang="en-US" sz="1000" dirty="0"/>
           </a:p>
@@ -7046,7 +7046,7 @@
                   <a:schemeClr val="bg1"/>
                 </a:solidFill>
               </a:rPr>
-              <a:t>1222 автотеста проходят, каждое число воспроизводится командой</a:t>
+              <a:t>1253 автотеста проходят, каждое число воспроизводится командой</a:t>
             </a:r>
             <a:endParaRPr lang="en-US" sz="1500" dirty="0"/>
           </a:p>
@@ -12430,7 +12430,7 @@
                           <a:ea typeface="Calibri" pitchFamily="34" charset="-122"/>
                           <a:cs typeface="Calibri" pitchFamily="34" charset="-120"/>
                         </a:rPr>
-                        <a:t>1222 автотестов; evidence.json</a:t>
+                        <a:t>1253 автотестов; evidence.json</a:t>
                       </a:r>
                       <a:endParaRPr lang="en-US" sz="1400" dirty="0">
                         <a:latin typeface="Calibri" charset="0"/>
@@ -25390,7 +25390,7 @@
                           <a:ea typeface="Calibri" pitchFamily="34" charset="-122"/>
                           <a:cs typeface="Calibri" pitchFamily="34" charset="-120"/>
                         </a:rPr>
-                        <a:t>1222 автотеста проходят (v0.3.0, evidence.json), независимая проверка на Cedar, реестр утверждений: каждое число воспроизводится командой</a:t>
+                        <a:t>1253 автотеста проходят (v0.3.0, evidence.json), независимая проверка на Cedar, реестр утверждений: каждое число воспроизводится командой</a:t>
                       </a:r>
                       <a:endParaRPr lang="en-US" sz="1300" dirty="0">
                         <a:latin typeface="Calibri" charset="0"/>

--- a/submission/slides/Mandat_VTB.pptx
+++ b/submission/slides/Mandat_VTB.pptx
@@ -134,7 +134,7 @@
   <p:extLst>
     <p:ext uri="{521415D9-36F7-43E2-AB2F-B90AF26B5E84}">
       <p14:sectionLst xmlns:p14="http://schemas.microsoft.com/office/powerpoint/2010/main">
-        <p14:section name="Питч · 5 минут" id="{c698e1eb-7d10-9b6f-275a-bd41a8b3bb13}">
+        <p14:section name="Питч · 5 минут" id="{b733024e-17e0-d39e-5ffd-d3d1d1a97a69}">
           <p14:sldIdLst>
             <p14:sldId id="256"/>
             <p14:sldId id="257"/>
@@ -152,7 +152,7 @@
             <p14:sldId id="269"/>
           </p14:sldIdLst>
         </p14:section>
-        <p14:section name="Приложение для вопросов жюри" id="{68eeefdd-8e4b-741a-0aa6-3c206428b117}">
+        <p14:section name="Приложение для вопросов жюри" id="{0b3574ea-ab51-573b-5032-320213aaa677}">
           <p14:sldIdLst>
             <p14:sldId id="270"/>
             <p14:sldId id="271"/>
@@ -6183,7 +6183,7 @@
                   <a:schemeClr val="accent4"/>
                 </a:solidFill>
               </a:rPr>
-              <a:t>Источники: vtb.ru — «Комплект МЧД и КЭП» в «ВТБ Бизнес», 10.2026; репозиторий «Мандата» v0.3.0: 1222 автотеста, evidence.json от 16.10.2026</a:t>
+              <a:t>Источники: vtb.ru — «Комплект МЧД и КЭП» в «ВТБ Бизнес», 10.2026; репозиторий «Мандата» v0.3.0: 1244 автотеста, evidence.json от 16.10.2026</a:t>
             </a:r>
             <a:endParaRPr lang="en-US" sz="1000" dirty="0"/>
           </a:p>
@@ -7046,7 +7046,7 @@
                   <a:schemeClr val="bg1"/>
                 </a:solidFill>
               </a:rPr>
-              <a:t>1222 автотеста проходят, каждое число воспроизводится командой</a:t>
+              <a:t>1244 автотеста проходят, каждое число воспроизводится командой</a:t>
             </a:r>
             <a:endParaRPr lang="en-US" sz="1500" dirty="0"/>
           </a:p>
@@ -12430,7 +12430,7 @@
                           <a:ea typeface="Calibri" pitchFamily="34" charset="-122"/>
                           <a:cs typeface="Calibri" pitchFamily="34" charset="-120"/>
                         </a:rPr>
-                        <a:t>1222 автотестов; evidence.json</a:t>
+                        <a:t>1244 автотестов; evidence.json</a:t>
                       </a:r>
                       <a:endParaRPr lang="en-US" sz="1400" dirty="0">
                         <a:latin typeface="Calibri" charset="0"/>
@@ -25390,7 +25390,7 @@
                           <a:ea typeface="Calibri" pitchFamily="34" charset="-122"/>
                           <a:cs typeface="Calibri" pitchFamily="34" charset="-120"/>
                         </a:rPr>
-                        <a:t>1222 автотеста проходят (v0.3.0, evidence.json), независимая проверка на Cedar, реестр утверждений: каждое число воспроизводится командой</a:t>
+                        <a:t>1244 автотеста проходят (v0.3.0, evidence.json), независимая проверка на Cedar, реестр утверждений: каждое число воспроизводится командой</a:t>
                       </a:r>
                       <a:endParaRPr lang="en-US" sz="1300" dirty="0">
                         <a:latin typeface="Calibri" charset="0"/>

--- a/submission/slides/Mandat_VTB.pptx
+++ b/submission/slides/Mandat_VTB.pptx
@@ -134,7 +134,7 @@
   <p:extLst>
     <p:ext uri="{521415D9-36F7-43E2-AB2F-B90AF26B5E84}">
       <p14:sectionLst xmlns:p14="http://schemas.microsoft.com/office/powerpoint/2010/main">
-        <p14:section name="Питч · 5 минут" id="{622c27a8-95a2-0db7-65aa-e810fff81505}">
+        <p14:section name="Питч · 5 минут" id="{a0fb3028-9cb1-9984-4b58-a88d97928ebe}">
           <p14:sldIdLst>
             <p14:sldId id="256"/>
             <p14:sldId id="257"/>
@@ -152,7 +152,7 @@
             <p14:sldId id="269"/>
           </p14:sldIdLst>
         </p14:section>
-        <p14:section name="Приложение для вопросов жюри" id="{965baedc-fa4e-333e-4bcb-8b7541b7b7df}">
+        <p14:section name="Приложение для вопросов жюри" id="{7ab746f4-3934-4728-2c8a-126ab9e2593b}">
           <p14:sldIdLst>
             <p14:sldId id="270"/>
             <p14:sldId id="271"/>
@@ -6183,7 +6183,7 @@
                   <a:schemeClr val="accent4"/>
                 </a:solidFill>
               </a:rPr>
-              <a:t>Источники: vtb.ru — «Комплект МЧД и КЭП» в «ВТБ Бизнес», 10.2026; репозиторий «Мандата» v0.3.0: 1223 автотеста, evidence.json от 16.10.2026</a:t>
+              <a:t>Источники: vtb.ru — «Комплект МЧД и КЭП» в «ВТБ Бизнес», 10.2026; репозиторий «Мандата» v0.3.0: 1258 автотестов, evidence.json от 16.10.2026</a:t>
             </a:r>
             <a:endParaRPr lang="en-US" sz="1000" dirty="0"/>
           </a:p>
@@ -7046,7 +7046,7 @@
                   <a:schemeClr val="bg1"/>
                 </a:solidFill>
               </a:rPr>
-              <a:t>1223 автотеста проходят, каждое число воспроизводится командой</a:t>
+              <a:t>1258 автотестов проходят, каждое число воспроизводится командой</a:t>
             </a:r>
             <a:endParaRPr lang="en-US" sz="1500" dirty="0"/>
           </a:p>
@@ -12430,7 +12430,7 @@
                           <a:ea typeface="Calibri" pitchFamily="34" charset="-122"/>
                           <a:cs typeface="Calibri" pitchFamily="34" charset="-120"/>
                         </a:rPr>
-                        <a:t>1223 автотестов; evidence.json</a:t>
+                        <a:t>1258 автотестов; evidence.json</a:t>
                       </a:r>
                       <a:endParaRPr lang="en-US" sz="1400" dirty="0">
                         <a:latin typeface="Calibri" charset="0"/>
@@ -25390,7 +25390,7 @@
                           <a:ea typeface="Calibri" pitchFamily="34" charset="-122"/>
                           <a:cs typeface="Calibri" pitchFamily="34" charset="-120"/>
                         </a:rPr>
-                        <a:t>1223 автотеста проходят (v0.3.0, evidence.json), независимая проверка на Cedar, реестр утверждений: каждое число воспроизводится командой</a:t>
+                        <a:t>1258 автотестов проходят (v0.3.0, evidence.json), независимая проверка на Cedar, реестр утверждений: каждое число воспроизводится командой</a:t>
                       </a:r>
                       <a:endParaRPr lang="en-US" sz="1300" dirty="0">
                         <a:latin typeface="Calibri" charset="0"/>

--- a/submission/slides/Mandat_VTB.pptx
+++ b/submission/slides/Mandat_VTB.pptx
@@ -134,7 +134,7 @@
   <p:extLst>
     <p:ext uri="{521415D9-36F7-43E2-AB2F-B90AF26B5E84}">
       <p14:sectionLst xmlns:p14="http://schemas.microsoft.com/office/powerpoint/2010/main">
-        <p14:section name="Питч · 5 минут" id="{a0fb3028-9cb1-9984-4b58-a88d97928ebe}">
+        <p14:section name="Питч · 5 минут" id="{94fdcb5b-2744-c1da-5911-f39808e84ae1}">
           <p14:sldIdLst>
             <p14:sldId id="256"/>
             <p14:sldId id="257"/>
@@ -152,7 +152,7 @@
             <p14:sldId id="269"/>
           </p14:sldIdLst>
         </p14:section>
-        <p14:section name="Приложение для вопросов жюри" id="{7ab746f4-3934-4728-2c8a-126ab9e2593b}">
+        <p14:section name="Приложение для вопросов жюри" id="{cd3f8de5-9627-86a3-10d3-87768f92277a}">
           <p14:sldIdLst>
             <p14:sldId id="270"/>
             <p14:sldId id="271"/>
@@ -6183,7 +6183,7 @@
                   <a:schemeClr val="accent4"/>
                 </a:solidFill>
               </a:rPr>
-              <a:t>Источники: vtb.ru — «Комплект МЧД и КЭП» в «ВТБ Бизнес», 10.2026; репозиторий «Мандата» v0.3.0: 1258 автотестов, evidence.json от 16.10.2026</a:t>
+              <a:t>Источники: vtb.ru — «Комплект МЧД и КЭП» в «ВТБ Бизнес», 10.2026; репозиторий «Мандата» v0.3.0: 1280 автотестов, evidence.json от 16.10.2026</a:t>
             </a:r>
             <a:endParaRPr lang="en-US" sz="1000" dirty="0"/>
           </a:p>
@@ -7046,7 +7046,7 @@
                   <a:schemeClr val="bg1"/>
                 </a:solidFill>
               </a:rPr>
-              <a:t>1258 автотестов проходят, каждое число воспроизводится командой</a:t>
+              <a:t>1280 автотестов проходят, каждое число воспроизводится командой</a:t>
             </a:r>
             <a:endParaRPr lang="en-US" sz="1500" dirty="0"/>
           </a:p>
@@ -12430,7 +12430,7 @@
                           <a:ea typeface="Calibri" pitchFamily="34" charset="-122"/>
                           <a:cs typeface="Calibri" pitchFamily="34" charset="-120"/>
                         </a:rPr>
-                        <a:t>1258 автотестов; evidence.json</a:t>
+                        <a:t>1280 автотестов; evidence.json</a:t>
                       </a:r>
                       <a:endParaRPr lang="en-US" sz="1400" dirty="0">
                         <a:latin typeface="Calibri" charset="0"/>
@@ -25390,7 +25390,7 @@
                           <a:ea typeface="Calibri" pitchFamily="34" charset="-122"/>
                           <a:cs typeface="Calibri" pitchFamily="34" charset="-120"/>
                         </a:rPr>
-                        <a:t>1258 автотестов проходят (v0.3.0, evidence.json), независимая проверка на Cedar, реестр утверждений: каждое число воспроизводится командой</a:t>
+                        <a:t>1280 автотестов проходят (v0.3.0, evidence.json), независимая проверка на Cedar, реестр утверждений: каждое число воспроизводится командой</a:t>
                       </a:r>
                       <a:endParaRPr lang="en-US" sz="1300" dirty="0">
                         <a:latin typeface="Calibri" charset="0"/>

--- a/submission/slides/Mandat_VTB.pptx
+++ b/submission/slides/Mandat_VTB.pptx
@@ -134,7 +134,7 @@
   <p:extLst>
     <p:ext uri="{521415D9-36F7-43E2-AB2F-B90AF26B5E84}">
       <p14:sectionLst xmlns:p14="http://schemas.microsoft.com/office/powerpoint/2010/main">
-        <p14:section name="Питч · 5 минут" id="{94fdcb5b-2744-c1da-5911-f39808e84ae1}">
+        <p14:section name="Питч · 5 минут" id="{edb45d78-0ae2-328f-1092-d177ba8f7556}">
           <p14:sldIdLst>
             <p14:sldId id="256"/>
             <p14:sldId id="257"/>
@@ -152,7 +152,7 @@
             <p14:sldId id="269"/>
           </p14:sldIdLst>
         </p14:section>
-        <p14:section name="Приложение для вопросов жюри" id="{cd3f8de5-9627-86a3-10d3-87768f92277a}">
+        <p14:section name="Приложение для вопросов жюри" id="{dbf914e0-87f8-13d4-492f-bdb675a3bb7d}">
           <p14:sldIdLst>
             <p14:sldId id="270"/>
             <p14:sldId id="271"/>
@@ -6183,7 +6183,7 @@
                   <a:schemeClr val="accent4"/>
                 </a:solidFill>
               </a:rPr>
-              <a:t>Источники: vtb.ru — «Комплект МЧД и КЭП» в «ВТБ Бизнес», 10.2026; репозиторий «Мандата» v0.3.0: 1280 автотестов, evidence.json от 16.10.2026</a:t>
+              <a:t>Источники: vtb.ru — «Комплект МЧД и КЭП» в «ВТБ Бизнес», 10.2026; репозиторий «Мандата» v0.3.0: 1327 автотестов, evidence.json от 16.10.2026</a:t>
             </a:r>
             <a:endParaRPr lang="en-US" sz="1000" dirty="0"/>
           </a:p>
@@ -7046,7 +7046,7 @@
                   <a:schemeClr val="bg1"/>
                 </a:solidFill>
               </a:rPr>
-              <a:t>1280 автотестов проходят, каждое число воспроизводится командой</a:t>
+              <a:t>1327 автотестов проходят, каждое число воспроизводится командой</a:t>
             </a:r>
             <a:endParaRPr lang="en-US" sz="1500" dirty="0"/>
           </a:p>
@@ -12430,7 +12430,7 @@
                           <a:ea typeface="Calibri" pitchFamily="34" charset="-122"/>
                           <a:cs typeface="Calibri" pitchFamily="34" charset="-120"/>
                         </a:rPr>
-                        <a:t>1280 автотестов; evidence.json</a:t>
+                        <a:t>1327 автотестов; evidence.json</a:t>
                       </a:r>
                       <a:endParaRPr lang="en-US" sz="1400" dirty="0">
                         <a:latin typeface="Calibri" charset="0"/>
@@ -25390,7 +25390,7 @@
                           <a:ea typeface="Calibri" pitchFamily="34" charset="-122"/>
                           <a:cs typeface="Calibri" pitchFamily="34" charset="-120"/>
                         </a:rPr>
-                        <a:t>1280 автотестов проходят (v0.3.0, evidence.json), независимая проверка на Cedar, реестр утверждений: каждое число воспроизводится командой</a:t>
+                        <a:t>1327 автотестов проходят (v0.3.0, evidence.json), независимая проверка на Cedar, реестр утверждений: каждое число воспроизводится командой</a:t>
                       </a:r>
                       <a:endParaRPr lang="en-US" sz="1300" dirty="0">
                         <a:latin typeface="Calibri" charset="0"/>

--- a/submission/slides/Mandat_VTB.pptx
+++ b/submission/slides/Mandat_VTB.pptx
@@ -134,7 +134,7 @@
   <p:extLst>
     <p:ext uri="{521415D9-36F7-43E2-AB2F-B90AF26B5E84}">
       <p14:sectionLst xmlns:p14="http://schemas.microsoft.com/office/powerpoint/2010/main">
-        <p14:section name="Питч · 5 минут" id="{a0fb3028-9cb1-9984-4b58-a88d97928ebe}">
+        <p14:section name="Питч · 5 минут" id="{edb45d78-0ae2-328f-1092-d177ba8f7556}">
           <p14:sldIdLst>
             <p14:sldId id="256"/>
             <p14:sldId id="257"/>
@@ -152,7 +152,7 @@
             <p14:sldId id="269"/>
           </p14:sldIdLst>
         </p14:section>
-        <p14:section name="Приложение для вопросов жюри" id="{7ab746f4-3934-4728-2c8a-126ab9e2593b}">
+        <p14:section name="Приложение для вопросов жюри" id="{dbf914e0-87f8-13d4-492f-bdb675a3bb7d}">
           <p14:sldIdLst>
             <p14:sldId id="270"/>
             <p14:sldId id="271"/>
@@ -6183,7 +6183,7 @@
                   <a:schemeClr val="accent4"/>
                 </a:solidFill>
               </a:rPr>
-              <a:t>Источники: vtb.ru — «Комплект МЧД и КЭП» в «ВТБ Бизнес», 10.2026; репозиторий «Мандата» v0.3.0: 1258 автотестов, evidence.json от 16.10.2026</a:t>
+              <a:t>Источники: vtb.ru — «Комплект МЧД и КЭП» в «ВТБ Бизнес», 10.2026; репозиторий «Мандата» v0.3.0: 1327 автотестов, evidence.json от 16.10.2026</a:t>
             </a:r>
             <a:endParaRPr lang="en-US" sz="1000" dirty="0"/>
           </a:p>
@@ -7046,7 +7046,7 @@
                   <a:schemeClr val="bg1"/>
                 </a:solidFill>
               </a:rPr>
-              <a:t>1258 автотестов проходят, каждое число воспроизводится командой</a:t>
+              <a:t>1327 автотестов проходят, каждое число воспроизводится командой</a:t>
             </a:r>
             <a:endParaRPr lang="en-US" sz="1500" dirty="0"/>
           </a:p>
@@ -12430,7 +12430,7 @@
                           <a:ea typeface="Calibri" pitchFamily="34" charset="-122"/>
                           <a:cs typeface="Calibri" pitchFamily="34" charset="-120"/>
                         </a:rPr>
-                        <a:t>1258 автотестов; evidence.json</a:t>
+                        <a:t>1327 автотестов; evidence.json</a:t>
                       </a:r>
                       <a:endParaRPr lang="en-US" sz="1400" dirty="0">
                         <a:latin typeface="Calibri" charset="0"/>
@@ -25390,7 +25390,7 @@
                           <a:ea typeface="Calibri" pitchFamily="34" charset="-122"/>
                           <a:cs typeface="Calibri" pitchFamily="34" charset="-120"/>
                         </a:rPr>
-                        <a:t>1258 автотестов проходят (v0.3.0, evidence.json), независимая проверка на Cedar, реестр утверждений: каждое число воспроизводится командой</a:t>
+                        <a:t>1327 автотестов проходят (v0.3.0, evidence.json), независимая проверка на Cedar, реестр утверждений: каждое число воспроизводится командой</a:t>
                       </a:r>
                       <a:endParaRPr lang="en-US" sz="1300" dirty="0">
                         <a:latin typeface="Calibri" charset="0"/>

--- a/submission/slides/Mandat_VTB.pptx
+++ b/submission/slides/Mandat_VTB.pptx
@@ -134,7 +134,7 @@
   <p:extLst>
     <p:ext uri="{521415D9-36F7-43E2-AB2F-B90AF26B5E84}">
       <p14:sectionLst xmlns:p14="http://schemas.microsoft.com/office/powerpoint/2010/main">
-        <p14:section name="Питч · 5 минут" id="{edb45d78-0ae2-328f-1092-d177ba8f7556}">
+        <p14:section name="Питч · 5 минут" id="{8174e5ea-008a-241f-3fbd-922cda515422}">
           <p14:sldIdLst>
             <p14:sldId id="256"/>
             <p14:sldId id="257"/>
@@ -152,7 +152,7 @@
             <p14:sldId id="269"/>
           </p14:sldIdLst>
         </p14:section>
-        <p14:section name="Приложение для вопросов жюри" id="{dbf914e0-87f8-13d4-492f-bdb675a3bb7d}">
+        <p14:section name="Приложение для вопросов жюри" id="{a57336c7-ba8e-c447-4746-f07861f76033}">
           <p14:sldIdLst>
             <p14:sldId id="270"/>
             <p14:sldId id="271"/>
@@ -6183,7 +6183,7 @@
                   <a:schemeClr val="accent4"/>
                 </a:solidFill>
               </a:rPr>
-              <a:t>Источники: vtb.ru — «Комплект МЧД и КЭП» в «ВТБ Бизнес», 10.2026; репозиторий «Мандата» v0.3.0: 1327 автотестов, evidence.json от 16.10.2026</a:t>
+              <a:t>Источники: vtb.ru — «Комплект МЧД и КЭП» в «ВТБ Бизнес», 10.2026; репозиторий «Мандата» v0.3.0: 1354 автотеста, evidence.json от 16.10.2026</a:t>
             </a:r>
             <a:endParaRPr lang="en-US" sz="1000" dirty="0"/>
           </a:p>
@@ -7046,7 +7046,7 @@
                   <a:schemeClr val="bg1"/>
                 </a:solidFill>
               </a:rPr>
-              <a:t>1327 автотестов проходят, каждое число воспроизводится командой</a:t>
+              <a:t>1354 автотеста проходят, каждое число воспроизводится командой</a:t>
             </a:r>
             <a:endParaRPr lang="en-US" sz="1500" dirty="0"/>
           </a:p>
@@ -12430,7 +12430,7 @@
                           <a:ea typeface="Calibri" pitchFamily="34" charset="-122"/>
                           <a:cs typeface="Calibri" pitchFamily="34" charset="-120"/>
                         </a:rPr>
-                        <a:t>1327 автотестов; evidence.json</a:t>
+                        <a:t>1354 автотестов; evidence.json</a:t>
                       </a:r>
                       <a:endParaRPr lang="en-US" sz="1400" dirty="0">
                         <a:latin typeface="Calibri" charset="0"/>
@@ -25390,7 +25390,7 @@
                           <a:ea typeface="Calibri" pitchFamily="34" charset="-122"/>
                           <a:cs typeface="Calibri" pitchFamily="34" charset="-120"/>
                         </a:rPr>
-                        <a:t>1327 автотестов проходят (v0.3.0, evidence.json), независимая проверка на Cedar, реестр утверждений: каждое число воспроизводится командой</a:t>
+                        <a:t>1354 автотеста проходят (v0.3.0, evidence.json), независимая проверка на Cedar, реестр утверждений: каждое число воспроизводится командой</a:t>
                       </a:r>
                       <a:endParaRPr lang="en-US" sz="1300" dirty="0">
                         <a:latin typeface="Calibri" charset="0"/>

--- a/submission/slides/Mandat_VTB.pptx
+++ b/submission/slides/Mandat_VTB.pptx
@@ -134,7 +134,7 @@
   <p:extLst>
     <p:ext uri="{521415D9-36F7-43E2-AB2F-B90AF26B5E84}">
       <p14:sectionLst xmlns:p14="http://schemas.microsoft.com/office/powerpoint/2010/main">
-        <p14:section name="Питч · 5 минут" id="{8174e5ea-008a-241f-3fbd-922cda515422}">
+        <p14:section name="Питч · 5 минут" id="{edb45d78-0ae2-328f-1092-d177ba8f7556}">
           <p14:sldIdLst>
             <p14:sldId id="256"/>
             <p14:sldId id="257"/>
@@ -152,7 +152,7 @@
             <p14:sldId id="269"/>
           </p14:sldIdLst>
         </p14:section>
-        <p14:section name="Приложение для вопросов жюри" id="{a57336c7-ba8e-c447-4746-f07861f76033}">
+        <p14:section name="Приложение для вопросов жюри" id="{dbf914e0-87f8-13d4-492f-bdb675a3bb7d}">
           <p14:sldIdLst>
             <p14:sldId id="270"/>
             <p14:sldId id="271"/>
@@ -6183,7 +6183,7 @@
                   <a:schemeClr val="accent4"/>
                 </a:solidFill>
               </a:rPr>
-              <a:t>Источники: vtb.ru — «Комплект МЧД и КЭП» в «ВТБ Бизнес», 10.2026; репозиторий «Мандата» v0.3.0: 1354 автотеста, evidence.json от 16.10.2026</a:t>
+              <a:t>Источники: vtb.ru — «Комплект МЧД и КЭП» в «ВТБ Бизнес», 10.2026; репозиторий «Мандата» v0.3.0: 1327 автотестов, evidence.json от 16.10.2026</a:t>
             </a:r>
             <a:endParaRPr lang="en-US" sz="1000" dirty="0"/>
           </a:p>
@@ -7046,7 +7046,7 @@
                   <a:schemeClr val="bg1"/>
                 </a:solidFill>
               </a:rPr>
-              <a:t>1354 автотеста проходят, каждое число воспроизводится командой</a:t>
+              <a:t>1327 автотестов проходят, каждое число воспроизводится командой</a:t>
             </a:r>
             <a:endParaRPr lang="en-US" sz="1500" dirty="0"/>
           </a:p>
@@ -12430,7 +12430,7 @@
                           <a:ea typeface="Calibri" pitchFamily="34" charset="-122"/>
                           <a:cs typeface="Calibri" pitchFamily="34" charset="-120"/>
                         </a:rPr>
-                        <a:t>1354 автотестов; evidence.json</a:t>
+                        <a:t>1327 автотестов; evidence.json</a:t>
                       </a:r>
                       <a:endParaRPr lang="en-US" sz="1400" dirty="0">
                         <a:latin typeface="Calibri" charset="0"/>
@@ -25390,7 +25390,7 @@
                           <a:ea typeface="Calibri" pitchFamily="34" charset="-122"/>
                           <a:cs typeface="Calibri" pitchFamily="34" charset="-120"/>
                         </a:rPr>
-                        <a:t>1354 автотеста проходят (v0.3.0, evidence.json), независимая проверка на Cedar, реестр утверждений: каждое число воспроизводится командой</a:t>
+                        <a:t>1327 автотестов проходят (v0.3.0, evidence.json), независимая проверка на Cedar, реестр утверждений: каждое число воспроизводится командой</a:t>
                       </a:r>
                       <a:endParaRPr lang="en-US" sz="1300" dirty="0">
                         <a:latin typeface="Calibri" charset="0"/>

--- a/submission/slides/Mandat_VTB.pptx
+++ b/submission/slides/Mandat_VTB.pptx
@@ -134,7 +134,7 @@
   <p:extLst>
     <p:ext uri="{521415D9-36F7-43E2-AB2F-B90AF26B5E84}">
       <p14:sectionLst xmlns:p14="http://schemas.microsoft.com/office/powerpoint/2010/main">
-        <p14:section name="Питч · 5 минут" id="{8174e5ea-008a-241f-3fbd-922cda515422}">
+        <p14:section name="Питч · 5 минут" id="{6555bb59-6f1a-7227-a94c-e7581679f3d4}">
           <p14:sldIdLst>
             <p14:sldId id="256"/>
             <p14:sldId id="257"/>
@@ -152,7 +152,7 @@
             <p14:sldId id="269"/>
           </p14:sldIdLst>
         </p14:section>
-        <p14:section name="Приложение для вопросов жюри" id="{a57336c7-ba8e-c447-4746-f07861f76033}">
+        <p14:section name="Приложение для вопросов жюри" id="{a24dda74-dd30-1bee-cce2-d63489ded22c}">
           <p14:sldIdLst>
             <p14:sldId id="270"/>
             <p14:sldId id="271"/>

--- a/submission/slides/Mandat_VTB.pptx
+++ b/submission/slides/Mandat_VTB.pptx
@@ -134,7 +134,7 @@
   <p:extLst>
     <p:ext uri="{521415D9-36F7-43E2-AB2F-B90AF26B5E84}">
       <p14:sectionLst xmlns:p14="http://schemas.microsoft.com/office/powerpoint/2010/main">
-        <p14:section name="Питч · 5 минут" id="{edb45d78-0ae2-328f-1092-d177ba8f7556}">
+        <p14:section name="Питч · 5 минут" id="{20cc72ab-383c-1feb-af12-5e36b43830cf}">
           <p14:sldIdLst>
             <p14:sldId id="256"/>
             <p14:sldId id="257"/>
@@ -152,7 +152,7 @@
             <p14:sldId id="269"/>
           </p14:sldIdLst>
         </p14:section>
-        <p14:section name="Приложение для вопросов жюри" id="{dbf914e0-87f8-13d4-492f-bdb675a3bb7d}">
+        <p14:section name="Приложение для вопросов жюри" id="{e1128119-9ea1-144d-aa70-9ecc617337ee}">
           <p14:sldIdLst>
             <p14:sldId id="270"/>
             <p14:sldId id="271"/>
@@ -6183,7 +6183,7 @@
                   <a:schemeClr val="accent4"/>
                 </a:solidFill>
               </a:rPr>
-              <a:t>Источники: vtb.ru — «Комплект МЧД и КЭП» в «ВТБ Бизнес», 10.2026; репозиторий «Мандата» v0.3.0: 1327 автотестов, evidence.json от 16.10.2026</a:t>
+              <a:t>Источники: vtb.ru — «Комплект МЧД и КЭП» в «ВТБ Бизнес», 10.2026; репозиторий «Мандата» v0.3.0: 1348 автотестов, evidence.json от 16.10.2026</a:t>
             </a:r>
             <a:endParaRPr lang="en-US" sz="1000" dirty="0"/>
           </a:p>
@@ -7046,7 +7046,7 @@
                   <a:schemeClr val="bg1"/>
                 </a:solidFill>
               </a:rPr>
-              <a:t>1327 автотестов проходят, каждое число воспроизводится командой</a:t>
+              <a:t>1348 автотестов проходят, каждое число воспроизводится командой</a:t>
             </a:r>
             <a:endParaRPr lang="en-US" sz="1500" dirty="0"/>
           </a:p>
@@ -12430,7 +12430,7 @@
                           <a:ea typeface="Calibri" pitchFamily="34" charset="-122"/>
                           <a:cs typeface="Calibri" pitchFamily="34" charset="-120"/>
                         </a:rPr>
-                        <a:t>1327 автотестов; evidence.json</a:t>
+                        <a:t>1348 автотестов; evidence.json</a:t>
                       </a:r>
                       <a:endParaRPr lang="en-US" sz="1400" dirty="0">
                         <a:latin typeface="Calibri" charset="0"/>
@@ -25390,7 +25390,7 @@
                           <a:ea typeface="Calibri" pitchFamily="34" charset="-122"/>
                           <a:cs typeface="Calibri" pitchFamily="34" charset="-120"/>
                         </a:rPr>
-                        <a:t>1327 автотестов проходят (v0.3.0, evidence.json), независимая проверка на Cedar, реестр утверждений: каждое число воспроизводится командой</a:t>
+                        <a:t>1348 автотестов проходят (v0.3.0, evidence.json), независимая проверка на Cedar, реестр утверждений: каждое число воспроизводится командой</a:t>
                       </a:r>
                       <a:endParaRPr lang="en-US" sz="1300" dirty="0">
                         <a:latin typeface="Calibri" charset="0"/>

--- a/submission/slides/Mandat_VTB.pptx
+++ b/submission/slides/Mandat_VTB.pptx
@@ -134,7 +134,7 @@
   <p:extLst>
     <p:ext uri="{521415D9-36F7-43E2-AB2F-B90AF26B5E84}">
       <p14:sectionLst xmlns:p14="http://schemas.microsoft.com/office/powerpoint/2010/main">
-        <p14:section name="Питч · 5 минут" id="{edb45d78-0ae2-328f-1092-d177ba8f7556}">
+        <p14:section name="Питч · 5 минут" id="{6555bb59-6f1a-7227-a94c-e7581679f3d4}">
           <p14:sldIdLst>
             <p14:sldId id="256"/>
             <p14:sldId id="257"/>
@@ -152,7 +152,7 @@
             <p14:sldId id="269"/>
           </p14:sldIdLst>
         </p14:section>
-        <p14:section name="Приложение для вопросов жюри" id="{dbf914e0-87f8-13d4-492f-bdb675a3bb7d}">
+        <p14:section name="Приложение для вопросов жюри" id="{a24dda74-dd30-1bee-cce2-d63489ded22c}">
           <p14:sldIdLst>
             <p14:sldId id="270"/>
             <p14:sldId id="271"/>
@@ -6183,7 +6183,7 @@
                   <a:schemeClr val="accent4"/>
                 </a:solidFill>
               </a:rPr>
-              <a:t>Источники: vtb.ru — «Комплект МЧД и КЭП» в «ВТБ Бизнес», 10.2026; репозиторий «Мандата» v0.3.0: 1327 автотестов, evidence.json от 16.10.2026</a:t>
+              <a:t>Источники: vtb.ru — «Комплект МЧД и КЭП» в «ВТБ Бизнес», 10.2026; репозиторий «Мандата» v0.3.0: 1354 автотеста, evidence.json от 16.10.2026</a:t>
             </a:r>
             <a:endParaRPr lang="en-US" sz="1000" dirty="0"/>
           </a:p>
@@ -7046,7 +7046,7 @@
                   <a:schemeClr val="bg1"/>
                 </a:solidFill>
               </a:rPr>
-              <a:t>1327 автотестов проходят, каждое число воспроизводится командой</a:t>
+              <a:t>1354 автотеста проходят, каждое число воспроизводится командой</a:t>
             </a:r>
             <a:endParaRPr lang="en-US" sz="1500" dirty="0"/>
           </a:p>
@@ -12430,7 +12430,7 @@
                           <a:ea typeface="Calibri" pitchFamily="34" charset="-122"/>
                           <a:cs typeface="Calibri" pitchFamily="34" charset="-120"/>
                         </a:rPr>
-                        <a:t>1327 автотестов; evidence.json</a:t>
+                        <a:t>1354 автотестов; evidence.json</a:t>
                       </a:r>
                       <a:endParaRPr lang="en-US" sz="1400" dirty="0">
                         <a:latin typeface="Calibri" charset="0"/>
@@ -25390,7 +25390,7 @@
                           <a:ea typeface="Calibri" pitchFamily="34" charset="-122"/>
                           <a:cs typeface="Calibri" pitchFamily="34" charset="-120"/>
                         </a:rPr>
-                        <a:t>1327 автотестов проходят (v0.3.0, evidence.json), независимая проверка на Cedar, реестр утверждений: каждое число воспроизводится командой</a:t>
+                        <a:t>1354 автотеста проходят (v0.3.0, evidence.json), независимая проверка на Cedar, реестр утверждений: каждое число воспроизводится командой</a:t>
                       </a:r>
                       <a:endParaRPr lang="en-US" sz="1300" dirty="0">
                         <a:latin typeface="Calibri" charset="0"/>

--- a/submission/slides/Mandat_VTB.pptx
+++ b/submission/slides/Mandat_VTB.pptx
@@ -134,7 +134,7 @@
   <p:extLst>
     <p:ext uri="{521415D9-36F7-43E2-AB2F-B90AF26B5E84}">
       <p14:sectionLst xmlns:p14="http://schemas.microsoft.com/office/powerpoint/2010/main">
-        <p14:section name="Питч · 5 минут" id="{6555bb59-6f1a-7227-a94c-e7581679f3d4}">
+        <p14:section name="Питч · 5 минут" id="{0d487e5d-13d1-27a9-c751-c94e621acd17}">
           <p14:sldIdLst>
             <p14:sldId id="256"/>
             <p14:sldId id="257"/>
@@ -152,7 +152,7 @@
             <p14:sldId id="269"/>
           </p14:sldIdLst>
         </p14:section>
-        <p14:section name="Приложение для вопросов жюри" id="{a24dda74-dd30-1bee-cce2-d63489ded22c}">
+        <p14:section name="Приложение для вопросов жюри" id="{f7d1debb-f8d1-30ff-679c-814fc922e812}">
           <p14:sldIdLst>
             <p14:sldId id="270"/>
             <p14:sldId id="271"/>
@@ -6183,7 +6183,7 @@
                   <a:schemeClr val="accent4"/>
                 </a:solidFill>
               </a:rPr>
-              <a:t>Источники: vtb.ru — «Комплект МЧД и КЭП» в «ВТБ Бизнес», 10.2026; репозиторий «Мандата» v0.3.0: 1354 автотеста, evidence.json от 16.10.2026</a:t>
+              <a:t>Источники: vtb.ru — «Комплект МЧД и КЭП» в «ВТБ Бизнес», 10.2026; репозиторий «Мандата» v0.3.0: 1375 автотестов, evidence.json от 16.10.2026</a:t>
             </a:r>
             <a:endParaRPr lang="en-US" sz="1000" dirty="0"/>
           </a:p>
@@ -7046,7 +7046,7 @@
                   <a:schemeClr val="bg1"/>
                 </a:solidFill>
               </a:rPr>
-              <a:t>1354 автотеста проходят, каждое число воспроизводится командой</a:t>
+              <a:t>1375 автотестов проходят, каждое число воспроизводится командой</a:t>
             </a:r>
             <a:endParaRPr lang="en-US" sz="1500" dirty="0"/>
           </a:p>
@@ -12430,7 +12430,7 @@
                           <a:ea typeface="Calibri" pitchFamily="34" charset="-122"/>
                           <a:cs typeface="Calibri" pitchFamily="34" charset="-120"/>
                         </a:rPr>
-                        <a:t>1354 автотестов; evidence.json</a:t>
+                        <a:t>1375 автотестов; evidence.json</a:t>
                       </a:r>
                       <a:endParaRPr lang="en-US" sz="1400" dirty="0">
                         <a:latin typeface="Calibri" charset="0"/>
@@ -25390,7 +25390,7 @@
                           <a:ea typeface="Calibri" pitchFamily="34" charset="-122"/>
                           <a:cs typeface="Calibri" pitchFamily="34" charset="-120"/>
                         </a:rPr>
-                        <a:t>1354 автотеста проходят (v0.3.0, evidence.json), независимая проверка на Cedar, реестр утверждений: каждое число воспроизводится командой</a:t>
+                        <a:t>1375 автотестов проходят (v0.3.0, evidence.json), независимая проверка на Cedar, реестр утверждений: каждое число воспроизводится командой</a:t>
                       </a:r>
                       <a:endParaRPr lang="en-US" sz="1300" dirty="0">
                         <a:latin typeface="Calibri" charset="0"/>

--- a/submission/slides/Mandat_VTB.pptx
+++ b/submission/slides/Mandat_VTB.pptx
@@ -134,7 +134,7 @@
   <p:extLst>
     <p:ext uri="{521415D9-36F7-43E2-AB2F-B90AF26B5E84}">
       <p14:sectionLst xmlns:p14="http://schemas.microsoft.com/office/powerpoint/2010/main">
-        <p14:section name="Питч · 5 минут" id="{0d487e5d-13d1-27a9-c751-c94e621acd17}">
+        <p14:section name="Питч · 5 минут" id="{768ba650-6f76-8537-3d3e-438fe988ae03}">
           <p14:sldIdLst>
             <p14:sldId id="256"/>
             <p14:sldId id="257"/>
@@ -152,7 +152,7 @@
             <p14:sldId id="269"/>
           </p14:sldIdLst>
         </p14:section>
-        <p14:section name="Приложение для вопросов жюри" id="{f7d1debb-f8d1-30ff-679c-814fc922e812}">
+        <p14:section name="Приложение для вопросов жюри" id="{ccee6c03-cd82-2109-11d1-244cfb921afb}">
           <p14:sldIdLst>
             <p14:sldId id="270"/>
             <p14:sldId id="271"/>
@@ -6183,7 +6183,7 @@
                   <a:schemeClr val="accent4"/>
                 </a:solidFill>
               </a:rPr>
-              <a:t>Источники: vtb.ru — «Комплект МЧД и КЭП» в «ВТБ Бизнес», 10.2026; репозиторий «Мандата» v0.3.0: 1375 автотестов, evidence.json от 16.10.2026</a:t>
+              <a:t>Источники: vtb.ru — «Комплект МЧД и КЭП» в «ВТБ Бизнес», 10.2026; репозиторий «Мандата» v0.3.0: 1394 автотеста, evidence.json от 16.10.2026</a:t>
             </a:r>
             <a:endParaRPr lang="en-US" sz="1000" dirty="0"/>
           </a:p>
@@ -7046,7 +7046,7 @@
                   <a:schemeClr val="bg1"/>
                 </a:solidFill>
               </a:rPr>
-              <a:t>1375 автотестов проходят, каждое число воспроизводится командой</a:t>
+              <a:t>1394 автотеста проходят, каждое число воспроизводится командой</a:t>
             </a:r>
             <a:endParaRPr lang="en-US" sz="1500" dirty="0"/>
           </a:p>
@@ -12430,7 +12430,7 @@
                           <a:ea typeface="Calibri" pitchFamily="34" charset="-122"/>
                           <a:cs typeface="Calibri" pitchFamily="34" charset="-120"/>
                         </a:rPr>
-                        <a:t>1375 автотестов; evidence.json</a:t>
+                        <a:t>1394 автотестов; evidence.json</a:t>
                       </a:r>
                       <a:endParaRPr lang="en-US" sz="1400" dirty="0">
                         <a:latin typeface="Calibri" charset="0"/>
@@ -25390,7 +25390,7 @@
                           <a:ea typeface="Calibri" pitchFamily="34" charset="-122"/>
                           <a:cs typeface="Calibri" pitchFamily="34" charset="-120"/>
                         </a:rPr>
-                        <a:t>1375 автотестов проходят (v0.3.0, evidence.json), независимая проверка на Cedar, реестр утверждений: каждое число воспроизводится командой</a:t>
+                        <a:t>1394 автотеста проходят (v0.3.0, evidence.json), независимая проверка на Cedar, реестр утверждений: каждое число воспроизводится командой</a:t>
                       </a:r>
                       <a:endParaRPr lang="en-US" sz="1300" dirty="0">
                         <a:latin typeface="Calibri" charset="0"/>
